--- a/ER Operations & Analytics Report.pptx
+++ b/ER Operations & Analytics Report.pptx
@@ -7,6 +7,7 @@
   <p:sldIdLst>
     <p:sldId id="256" r:id="rId2"/>
     <p:sldId id="257" r:id="rId3"/>
+    <p:sldId id="271" r:id="rId21"/>
     <p:sldId id="258" r:id="rId4"/>
     <p:sldId id="259" r:id="rId5"/>
     <p:sldId id="260" r:id="rId6"/>
@@ -18,6 +19,8 @@
     <p:sldId id="266" r:id="rId12"/>
     <p:sldId id="267" r:id="rId13"/>
     <p:sldId id="268" r:id="rId14"/>
+    <p:sldId id="272" r:id="rId22"/>
+    <p:sldId id="273" r:id="rId23"/>
     <p:sldId id="269" r:id="rId15"/>
     <p:sldId id="270" r:id="rId16"/>
   </p:sldIdLst>
@@ -4708,6 +4711,3300 @@
                 <a:latin typeface="Outfit"/>
               </a:rPr>
               <a:t>ER Dashboard Analytics &amp; Operational Review</a:t>
+            </a:r>
+          </a:p>
+        </p:txBody>
+      </p:sp>
+    </p:spTree>
+  </p:cSld>
+  <p:clrMapOvr>
+    <a:masterClrMapping/>
+  </p:clrMapOvr>
+</p:sld>
+</file>
+
+<file path=ppt/slides/slide16.xml><?xml version="1.0" encoding="utf-8"?>
+<p:sld xmlns:a="http://schemas.openxmlformats.org/drawingml/2006/main" xmlns:r="http://schemas.openxmlformats.org/officeDocument/2006/relationships" xmlns:p="http://schemas.openxmlformats.org/presentationml/2006/main">
+  <p:cSld>
+    <p:spTree>
+      <p:nvGrpSpPr>
+        <p:cNvPr id="1" name=""/>
+        <p:cNvGrpSpPr/>
+        <p:nvPr/>
+      </p:nvGrpSpPr>
+      <p:grpSpPr>
+        <a:xfrm>
+          <a:off x="0" y="0"/>
+          <a:ext cx="0" cy="0"/>
+          <a:chOff x="0" y="0"/>
+          <a:chExt cx="0" cy="0"/>
+        </a:xfrm>
+      </p:grpSpPr>
+      <p:pic>
+        <p:nvPicPr>
+          <p:cNvPr id="2" name="Picture 1" descr="image.png"/>
+          <p:cNvPicPr>
+            <a:picLocks noChangeAspect="1"/>
+          </p:cNvPicPr>
+          <p:nvPr/>
+        </p:nvPicPr>
+        <p:blipFill>
+          <a:blip r:embed="rId2"/>
+          <a:stretch>
+            <a:fillRect/>
+          </a:stretch>
+        </p:blipFill>
+        <p:spPr>
+          <a:xfrm>
+            <a:off x="0" y="0"/>
+            <a:ext cx="12192000" cy="6858000"/>
+          </a:xfrm>
+          <a:prstGeom prst="rect">
+            <a:avLst/>
+          </a:prstGeom>
+        </p:spPr>
+      </p:pic>
+      <p:sp>
+        <p:nvSpPr>
+          <p:cNvPr id="11" name="Title 11"/>
+          <p:cNvSpPr txBox="1"/>
+          <p:nvPr/>
+        </p:nvSpPr>
+        <p:spPr>
+          <a:xfrm>
+            <a:off x="571500" y="493776"/>
+            <a:ext cx="10972800" cy="640080"/>
+          </a:xfrm>
+          <a:prstGeom prst="rect">
+            <a:avLst/>
+          </a:prstGeom>
+          <a:noFill/>
+          <a:ln>
+            <a:noFill/>
+          </a:ln>
+        </p:spPr>
+        <p:txBody>
+          <a:bodyPr wrap="square" lIns="0" tIns="0" rIns="0" bIns="0" anchor="t">
+            <a:noAutofit/>
+          </a:bodyPr>
+          <a:lstStyle/>
+          <a:p>
+            <a:pPr algn="l">
+              <a:spcAft>
+                <a:spcPts val="0"/>
+              </a:spcAft>
+            </a:pPr>
+            <a:r>
+              <a:rPr lang="en-US" sz="3450" b="1" i="0" u="none">
+                <a:solidFill>
+                  <a:srgbClr val="FFFFFF"/>
+                </a:solidFill>
+                <a:latin typeface="Space Grotesk"/>
+              </a:rPr>
+              <a:t>Problem </a:t>
+            </a:r>
+            <a:r>
+              <a:rPr lang="en-US" sz="3450" b="1" i="0" u="none">
+                <a:solidFill>
+                  <a:srgbClr val="38BDF8"/>
+                </a:solidFill>
+                <a:latin typeface="Space Grotesk"/>
+              </a:rPr>
+              <a:t>Statement</a:t>
+            </a:r>
+          </a:p>
+        </p:txBody>
+      </p:sp>
+      <p:sp>
+        <p:nvSpPr>
+          <p:cNvPr id="12" name="Rule 12"/>
+          <p:cNvSpPr/>
+          <p:nvPr/>
+        </p:nvSpPr>
+        <p:spPr>
+          <a:xfrm>
+            <a:off x="571500" y="1185977"/>
+            <a:ext cx="11048695" cy="9510"/>
+          </a:xfrm>
+          <a:prstGeom prst="rect">
+            <a:avLst/>
+          </a:prstGeom>
+          <a:solidFill>
+            <a:srgbClr val="FFFFFF"/>
+          </a:solidFill>
+          <a:ln>
+            <a:noFill/>
+          </a:ln>
+        </p:spPr>
+        <p:txBody>
+          <a:bodyPr wrap="square" lIns="0" tIns="0" rIns="0" bIns="0" anchor="t">
+            <a:noAutofit/>
+          </a:bodyPr>
+          <a:lstStyle/>
+          <a:p>
+            <a:endParaRPr lang="en-US"/>
+          </a:p>
+        </p:txBody>
+      </p:sp>
+      <p:sp>
+        <p:nvSpPr>
+          <p:cNvPr id="13" name="Statement 13"/>
+          <p:cNvSpPr txBox="1"/>
+          <p:nvPr/>
+        </p:nvSpPr>
+        <p:spPr>
+          <a:xfrm>
+            <a:off x="571500" y="1417320"/>
+            <a:ext cx="11045952" cy="822960"/>
+          </a:xfrm>
+          <a:prstGeom prst="rect">
+            <a:avLst/>
+          </a:prstGeom>
+          <a:noFill/>
+          <a:ln>
+            <a:noFill/>
+          </a:ln>
+        </p:spPr>
+        <p:txBody>
+          <a:bodyPr wrap="square" lIns="0" tIns="0" rIns="0" bIns="0" anchor="t">
+            <a:noAutofit/>
+          </a:bodyPr>
+          <a:lstStyle/>
+          <a:p>
+            <a:pPr algn="l">
+              <a:lnSpc>
+                <a:spcPct val="110000"/>
+              </a:lnSpc>
+              <a:spcAft>
+                <a:spcPts val="0"/>
+              </a:spcAft>
+            </a:pPr>
+            <a:r>
+              <a:rPr lang="en-US" sz="1800" b="1" i="0" u="none">
+                <a:solidFill>
+                  <a:srgbClr val="FFFFFF"/>
+                </a:solidFill>
+                <a:latin typeface="Space Grotesk"/>
+              </a:rPr>
+              <a:t>Over half of ER patients are seen late. </a:t>
+            </a:r>
+            <a:r>
+              <a:rPr lang="en-US" sz="1800" b="0" i="0" u="none">
+                <a:solidFill>
+                  <a:srgbClr val="9CA3AF"/>
+                </a:solidFill>
+                <a:latin typeface="Outfit"/>
+              </a:rPr>
+              <a:t>Unreferred walk-ins and admitted patients boarding in the ER choke front-end throughput, leaving patient satisfaction at an average-to-poor 5.30.</a:t>
+            </a:r>
+          </a:p>
+        </p:txBody>
+      </p:sp>
+      <p:sp>
+        <p:nvSpPr>
+          <p:cNvPr id="14" name="Card 14"/>
+          <p:cNvSpPr/>
+          <p:nvPr/>
+        </p:nvSpPr>
+        <p:spPr>
+          <a:xfrm>
+            <a:off x="571500" y="2606040"/>
+            <a:ext cx="2606040" cy="3017520"/>
+          </a:xfrm>
+          <a:prstGeom prst="roundRect">
+            <a:avLst>
+              <a:gd name="adj" fmla="val 8000"/>
+            </a:avLst>
+          </a:prstGeom>
+          <a:solidFill>
+            <a:srgbClr val="111827"/>
+          </a:solidFill>
+          <a:ln w="9525">
+            <a:solidFill>
+              <a:srgbClr val="1F2937"/>
+            </a:solidFill>
+          </a:ln>
+        </p:spPr>
+        <p:txBody>
+          <a:bodyPr wrap="square" lIns="0" tIns="0" rIns="0" bIns="0" anchor="t">
+            <a:noAutofit/>
+          </a:bodyPr>
+          <a:lstStyle/>
+          <a:p>
+            <a:endParaRPr lang="en-US"/>
+          </a:p>
+        </p:txBody>
+      </p:sp>
+      <p:sp>
+        <p:nvSpPr>
+          <p:cNvPr id="15" name="Stat 15"/>
+          <p:cNvSpPr txBox="1"/>
+          <p:nvPr/>
+        </p:nvSpPr>
+        <p:spPr>
+          <a:xfrm>
+            <a:off x="800100" y="2788920"/>
+            <a:ext cx="2148840" cy="868680"/>
+          </a:xfrm>
+          <a:prstGeom prst="rect">
+            <a:avLst/>
+          </a:prstGeom>
+          <a:noFill/>
+          <a:ln>
+            <a:noFill/>
+          </a:ln>
+        </p:spPr>
+        <p:txBody>
+          <a:bodyPr wrap="square" lIns="0" tIns="0" rIns="0" bIns="0" anchor="t">
+            <a:noAutofit/>
+          </a:bodyPr>
+          <a:lstStyle/>
+          <a:p>
+            <a:pPr algn="l">
+              <a:spcAft>
+                <a:spcPts val="0"/>
+              </a:spcAft>
+            </a:pPr>
+            <a:r>
+              <a:rPr lang="en-US" sz="4800" b="1" i="0" u="none">
+                <a:solidFill>
+                  <a:srgbClr val="F59E0B"/>
+                </a:solidFill>
+                <a:latin typeface="Space Grotesk"/>
+              </a:rPr>
+              <a:t>57%</a:t>
+            </a:r>
+          </a:p>
+        </p:txBody>
+      </p:sp>
+      <p:sp>
+        <p:nvSpPr>
+          <p:cNvPr id="16" name="Label 16"/>
+          <p:cNvSpPr txBox="1"/>
+          <p:nvPr/>
+        </p:nvSpPr>
+        <p:spPr>
+          <a:xfrm>
+            <a:off x="800100" y="3749040"/>
+            <a:ext cx="2148840" cy="411480"/>
+          </a:xfrm>
+          <a:prstGeom prst="rect">
+            <a:avLst/>
+          </a:prstGeom>
+          <a:noFill/>
+          <a:ln>
+            <a:noFill/>
+          </a:ln>
+        </p:spPr>
+        <p:txBody>
+          <a:bodyPr wrap="square" lIns="0" tIns="0" rIns="0" bIns="0" anchor="t">
+            <a:noAutofit/>
+          </a:bodyPr>
+          <a:lstStyle/>
+          <a:p>
+            <a:pPr algn="l">
+              <a:spcAft>
+                <a:spcPts val="0"/>
+              </a:spcAft>
+            </a:pPr>
+            <a:r>
+              <a:rPr lang="en-US" sz="1200" b="1" i="0" u="none">
+                <a:solidFill>
+                  <a:srgbClr val="E5E7EB"/>
+                </a:solidFill>
+                <a:latin typeface="Outfit"/>
+              </a:rPr>
+              <a:t>PATIENTS DELAYED</a:t>
+            </a:r>
+          </a:p>
+        </p:txBody>
+      </p:sp>
+      <p:sp>
+        <p:nvSpPr>
+          <p:cNvPr id="17" name="Desc 17"/>
+          <p:cNvSpPr txBox="1"/>
+          <p:nvPr/>
+        </p:nvSpPr>
+        <p:spPr>
+          <a:xfrm>
+            <a:off x="800100" y="4206240"/>
+            <a:ext cx="2148840" cy="1783080"/>
+          </a:xfrm>
+          <a:prstGeom prst="rect">
+            <a:avLst/>
+          </a:prstGeom>
+          <a:noFill/>
+          <a:ln>
+            <a:noFill/>
+          </a:ln>
+        </p:spPr>
+        <p:txBody>
+          <a:bodyPr wrap="square" lIns="0" tIns="0" rIns="0" bIns="0" anchor="t">
+            <a:noAutofit/>
+          </a:bodyPr>
+          <a:lstStyle/>
+          <a:p>
+            <a:pPr algn="l">
+              <a:lnSpc>
+                <a:spcPct val="120000"/>
+              </a:lnSpc>
+              <a:spcAft>
+                <a:spcPts val="0"/>
+              </a:spcAft>
+            </a:pPr>
+            <a:r>
+              <a:rPr lang="en-US" sz="1400" b="0" i="0" u="none">
+                <a:solidFill>
+                  <a:srgbClr val="9CA3AF"/>
+                </a:solidFill>
+                <a:latin typeface="Outfit"/>
+              </a:rPr>
+              <a:t>273 of 479 patients missed the triage time standard; average wait is 34.9 min.</a:t>
+            </a:r>
+          </a:p>
+        </p:txBody>
+      </p:sp>
+      <p:sp>
+        <p:nvSpPr>
+          <p:cNvPr id="18" name="Card 18"/>
+          <p:cNvSpPr/>
+          <p:nvPr/>
+        </p:nvSpPr>
+        <p:spPr>
+          <a:xfrm>
+            <a:off x="3385109" y="2606040"/>
+            <a:ext cx="2606040" cy="3017520"/>
+          </a:xfrm>
+          <a:prstGeom prst="roundRect">
+            <a:avLst>
+              <a:gd name="adj" fmla="val 8000"/>
+            </a:avLst>
+          </a:prstGeom>
+          <a:solidFill>
+            <a:srgbClr val="111827"/>
+          </a:solidFill>
+          <a:ln w="9525">
+            <a:solidFill>
+              <a:srgbClr val="1F2937"/>
+            </a:solidFill>
+          </a:ln>
+        </p:spPr>
+        <p:txBody>
+          <a:bodyPr wrap="square" lIns="0" tIns="0" rIns="0" bIns="0" anchor="t">
+            <a:noAutofit/>
+          </a:bodyPr>
+          <a:lstStyle/>
+          <a:p>
+            <a:endParaRPr lang="en-US"/>
+          </a:p>
+        </p:txBody>
+      </p:sp>
+      <p:sp>
+        <p:nvSpPr>
+          <p:cNvPr id="19" name="Stat 19"/>
+          <p:cNvSpPr txBox="1"/>
+          <p:nvPr/>
+        </p:nvSpPr>
+        <p:spPr>
+          <a:xfrm>
+            <a:off x="3613709" y="2788920"/>
+            <a:ext cx="2148840" cy="868680"/>
+          </a:xfrm>
+          <a:prstGeom prst="rect">
+            <a:avLst/>
+          </a:prstGeom>
+          <a:noFill/>
+          <a:ln>
+            <a:noFill/>
+          </a:ln>
+        </p:spPr>
+        <p:txBody>
+          <a:bodyPr wrap="square" lIns="0" tIns="0" rIns="0" bIns="0" anchor="t">
+            <a:noAutofit/>
+          </a:bodyPr>
+          <a:lstStyle/>
+          <a:p>
+            <a:pPr algn="l">
+              <a:spcAft>
+                <a:spcPts val="0"/>
+              </a:spcAft>
+            </a:pPr>
+            <a:r>
+              <a:rPr lang="en-US" sz="4800" b="1" i="0" u="none">
+                <a:solidFill>
+                  <a:srgbClr val="38BDF8"/>
+                </a:solidFill>
+                <a:latin typeface="Space Grotesk"/>
+              </a:rPr>
+              <a:t>55%</a:t>
+            </a:r>
+          </a:p>
+        </p:txBody>
+      </p:sp>
+      <p:sp>
+        <p:nvSpPr>
+          <p:cNvPr id="20" name="Label 20"/>
+          <p:cNvSpPr txBox="1"/>
+          <p:nvPr/>
+        </p:nvSpPr>
+        <p:spPr>
+          <a:xfrm>
+            <a:off x="3613709" y="3749040"/>
+            <a:ext cx="2148840" cy="411480"/>
+          </a:xfrm>
+          <a:prstGeom prst="rect">
+            <a:avLst/>
+          </a:prstGeom>
+          <a:noFill/>
+          <a:ln>
+            <a:noFill/>
+          </a:ln>
+        </p:spPr>
+        <p:txBody>
+          <a:bodyPr wrap="square" lIns="0" tIns="0" rIns="0" bIns="0" anchor="t">
+            <a:noAutofit/>
+          </a:bodyPr>
+          <a:lstStyle/>
+          <a:p>
+            <a:pPr algn="l">
+              <a:spcAft>
+                <a:spcPts val="0"/>
+              </a:spcAft>
+            </a:pPr>
+            <a:r>
+              <a:rPr lang="en-US" sz="1200" b="1" i="0" u="none">
+                <a:solidFill>
+                  <a:srgbClr val="E5E7EB"/>
+                </a:solidFill>
+                <a:latin typeface="Outfit"/>
+              </a:rPr>
+              <a:t>UNREFERRED WALK-INS</a:t>
+            </a:r>
+          </a:p>
+        </p:txBody>
+      </p:sp>
+      <p:sp>
+        <p:nvSpPr>
+          <p:cNvPr id="21" name="Desc 21"/>
+          <p:cNvSpPr txBox="1"/>
+          <p:nvPr/>
+        </p:nvSpPr>
+        <p:spPr>
+          <a:xfrm>
+            <a:off x="3613709" y="4206240"/>
+            <a:ext cx="2148840" cy="1783080"/>
+          </a:xfrm>
+          <a:prstGeom prst="rect">
+            <a:avLst/>
+          </a:prstGeom>
+          <a:noFill/>
+          <a:ln>
+            <a:noFill/>
+          </a:ln>
+        </p:spPr>
+        <p:txBody>
+          <a:bodyPr wrap="square" lIns="0" tIns="0" rIns="0" bIns="0" anchor="t">
+            <a:noAutofit/>
+          </a:bodyPr>
+          <a:lstStyle/>
+          <a:p>
+            <a:pPr algn="l">
+              <a:lnSpc>
+                <a:spcPct val="120000"/>
+              </a:lnSpc>
+              <a:spcAft>
+                <a:spcPts val="0"/>
+              </a:spcAft>
+            </a:pPr>
+            <a:r>
+              <a:rPr lang="en-US" sz="1400" b="0" i="0" u="none">
+                <a:solidFill>
+                  <a:srgbClr val="9CA3AF"/>
+                </a:solidFill>
+                <a:latin typeface="Outfit"/>
+              </a:rPr>
+              <a:t>263 patients arrived with no referral and need longer diagnostics and triage.</a:t>
+            </a:r>
+          </a:p>
+        </p:txBody>
+      </p:sp>
+      <p:sp>
+        <p:nvSpPr>
+          <p:cNvPr id="22" name="Card 22"/>
+          <p:cNvSpPr/>
+          <p:nvPr/>
+        </p:nvSpPr>
+        <p:spPr>
+          <a:xfrm>
+            <a:off x="6198718" y="2606040"/>
+            <a:ext cx="2606040" cy="3017520"/>
+          </a:xfrm>
+          <a:prstGeom prst="roundRect">
+            <a:avLst>
+              <a:gd name="adj" fmla="val 8000"/>
+            </a:avLst>
+          </a:prstGeom>
+          <a:solidFill>
+            <a:srgbClr val="111827"/>
+          </a:solidFill>
+          <a:ln w="9525">
+            <a:solidFill>
+              <a:srgbClr val="1F2937"/>
+            </a:solidFill>
+          </a:ln>
+        </p:spPr>
+        <p:txBody>
+          <a:bodyPr wrap="square" lIns="0" tIns="0" rIns="0" bIns="0" anchor="t">
+            <a:noAutofit/>
+          </a:bodyPr>
+          <a:lstStyle/>
+          <a:p>
+            <a:endParaRPr lang="en-US"/>
+          </a:p>
+        </p:txBody>
+      </p:sp>
+      <p:sp>
+        <p:nvSpPr>
+          <p:cNvPr id="23" name="Stat 23"/>
+          <p:cNvSpPr txBox="1"/>
+          <p:nvPr/>
+        </p:nvSpPr>
+        <p:spPr>
+          <a:xfrm>
+            <a:off x="6427318" y="2788920"/>
+            <a:ext cx="2148840" cy="868680"/>
+          </a:xfrm>
+          <a:prstGeom prst="rect">
+            <a:avLst/>
+          </a:prstGeom>
+          <a:noFill/>
+          <a:ln>
+            <a:noFill/>
+          </a:ln>
+        </p:spPr>
+        <p:txBody>
+          <a:bodyPr wrap="square" lIns="0" tIns="0" rIns="0" bIns="0" anchor="t">
+            <a:noAutofit/>
+          </a:bodyPr>
+          <a:lstStyle/>
+          <a:p>
+            <a:pPr algn="l">
+              <a:spcAft>
+                <a:spcPts val="0"/>
+              </a:spcAft>
+            </a:pPr>
+            <a:r>
+              <a:rPr lang="en-US" sz="4800" b="1" i="0" u="none">
+                <a:solidFill>
+                  <a:srgbClr val="38BDF8"/>
+                </a:solidFill>
+                <a:latin typeface="Space Grotesk"/>
+              </a:rPr>
+              <a:t>49%</a:t>
+            </a:r>
+          </a:p>
+        </p:txBody>
+      </p:sp>
+      <p:sp>
+        <p:nvSpPr>
+          <p:cNvPr id="24" name="Label 24"/>
+          <p:cNvSpPr txBox="1"/>
+          <p:nvPr/>
+        </p:nvSpPr>
+        <p:spPr>
+          <a:xfrm>
+            <a:off x="6427318" y="3749040"/>
+            <a:ext cx="2148840" cy="411480"/>
+          </a:xfrm>
+          <a:prstGeom prst="rect">
+            <a:avLst/>
+          </a:prstGeom>
+          <a:noFill/>
+          <a:ln>
+            <a:noFill/>
+          </a:ln>
+        </p:spPr>
+        <p:txBody>
+          <a:bodyPr wrap="square" lIns="0" tIns="0" rIns="0" bIns="0" anchor="t">
+            <a:noAutofit/>
+          </a:bodyPr>
+          <a:lstStyle/>
+          <a:p>
+            <a:pPr algn="l">
+              <a:spcAft>
+                <a:spcPts val="0"/>
+              </a:spcAft>
+            </a:pPr>
+            <a:r>
+              <a:rPr lang="en-US" sz="1200" b="1" i="0" u="none">
+                <a:solidFill>
+                  <a:srgbClr val="E5E7EB"/>
+                </a:solidFill>
+                <a:latin typeface="Outfit"/>
+              </a:rPr>
+              <a:t>ADMITTED FROM THE ER</a:t>
+            </a:r>
+          </a:p>
+        </p:txBody>
+      </p:sp>
+      <p:sp>
+        <p:nvSpPr>
+          <p:cNvPr id="25" name="Desc 25"/>
+          <p:cNvSpPr txBox="1"/>
+          <p:nvPr/>
+        </p:nvSpPr>
+        <p:spPr>
+          <a:xfrm>
+            <a:off x="6427318" y="4206240"/>
+            <a:ext cx="2148840" cy="1783080"/>
+          </a:xfrm>
+          <a:prstGeom prst="rect">
+            <a:avLst/>
+          </a:prstGeom>
+          <a:noFill/>
+          <a:ln>
+            <a:noFill/>
+          </a:ln>
+        </p:spPr>
+        <p:txBody>
+          <a:bodyPr wrap="square" lIns="0" tIns="0" rIns="0" bIns="0" anchor="t">
+            <a:noAutofit/>
+          </a:bodyPr>
+          <a:lstStyle/>
+          <a:p>
+            <a:pPr algn="l">
+              <a:lnSpc>
+                <a:spcPct val="120000"/>
+              </a:lnSpc>
+              <a:spcAft>
+                <a:spcPts val="0"/>
+              </a:spcAft>
+            </a:pPr>
+            <a:r>
+              <a:rPr lang="en-US" sz="1400" b="0" i="0" u="none">
+                <a:solidFill>
+                  <a:srgbClr val="9CA3AF"/>
+                </a:solidFill>
+                <a:latin typeface="Outfit"/>
+              </a:rPr>
+              <a:t>237 patients need inpatient beds; when none are free they board in the ER.</a:t>
+            </a:r>
+          </a:p>
+        </p:txBody>
+      </p:sp>
+      <p:sp>
+        <p:nvSpPr>
+          <p:cNvPr id="26" name="Card 26"/>
+          <p:cNvSpPr/>
+          <p:nvPr/>
+        </p:nvSpPr>
+        <p:spPr>
+          <a:xfrm>
+            <a:off x="9012326" y="2606040"/>
+            <a:ext cx="2606040" cy="3017520"/>
+          </a:xfrm>
+          <a:prstGeom prst="roundRect">
+            <a:avLst>
+              <a:gd name="adj" fmla="val 8000"/>
+            </a:avLst>
+          </a:prstGeom>
+          <a:solidFill>
+            <a:srgbClr val="111827"/>
+          </a:solidFill>
+          <a:ln w="9525">
+            <a:solidFill>
+              <a:srgbClr val="1F2937"/>
+            </a:solidFill>
+          </a:ln>
+        </p:spPr>
+        <p:txBody>
+          <a:bodyPr wrap="square" lIns="0" tIns="0" rIns="0" bIns="0" anchor="t">
+            <a:noAutofit/>
+          </a:bodyPr>
+          <a:lstStyle/>
+          <a:p>
+            <a:endParaRPr lang="en-US"/>
+          </a:p>
+        </p:txBody>
+      </p:sp>
+      <p:sp>
+        <p:nvSpPr>
+          <p:cNvPr id="27" name="Stat 27"/>
+          <p:cNvSpPr txBox="1"/>
+          <p:nvPr/>
+        </p:nvSpPr>
+        <p:spPr>
+          <a:xfrm>
+            <a:off x="9240926" y="2788920"/>
+            <a:ext cx="2148840" cy="868680"/>
+          </a:xfrm>
+          <a:prstGeom prst="rect">
+            <a:avLst/>
+          </a:prstGeom>
+          <a:noFill/>
+          <a:ln>
+            <a:noFill/>
+          </a:ln>
+        </p:spPr>
+        <p:txBody>
+          <a:bodyPr wrap="square" lIns="0" tIns="0" rIns="0" bIns="0" anchor="t">
+            <a:noAutofit/>
+          </a:bodyPr>
+          <a:lstStyle/>
+          <a:p>
+            <a:pPr algn="l">
+              <a:spcAft>
+                <a:spcPts val="0"/>
+              </a:spcAft>
+            </a:pPr>
+            <a:r>
+              <a:rPr lang="en-US" sz="4800" b="1" i="0" u="none">
+                <a:solidFill>
+                  <a:srgbClr val="F59E0B"/>
+                </a:solidFill>
+                <a:latin typeface="Space Grotesk"/>
+              </a:rPr>
+              <a:t>5.30</a:t>
+            </a:r>
+          </a:p>
+        </p:txBody>
+      </p:sp>
+      <p:sp>
+        <p:nvSpPr>
+          <p:cNvPr id="28" name="Label 28"/>
+          <p:cNvSpPr txBox="1"/>
+          <p:nvPr/>
+        </p:nvSpPr>
+        <p:spPr>
+          <a:xfrm>
+            <a:off x="9240926" y="3749040"/>
+            <a:ext cx="2148840" cy="411480"/>
+          </a:xfrm>
+          <a:prstGeom prst="rect">
+            <a:avLst/>
+          </a:prstGeom>
+          <a:noFill/>
+          <a:ln>
+            <a:noFill/>
+          </a:ln>
+        </p:spPr>
+        <p:txBody>
+          <a:bodyPr wrap="square" lIns="0" tIns="0" rIns="0" bIns="0" anchor="t">
+            <a:noAutofit/>
+          </a:bodyPr>
+          <a:lstStyle/>
+          <a:p>
+            <a:pPr algn="l">
+              <a:spcAft>
+                <a:spcPts val="0"/>
+              </a:spcAft>
+            </a:pPr>
+            <a:r>
+              <a:rPr lang="en-US" sz="1200" b="1" i="0" u="none">
+                <a:solidFill>
+                  <a:srgbClr val="E5E7EB"/>
+                </a:solidFill>
+                <a:latin typeface="Outfit"/>
+              </a:rPr>
+              <a:t>SATISFACTION SCORE</a:t>
+            </a:r>
+          </a:p>
+        </p:txBody>
+      </p:sp>
+      <p:sp>
+        <p:nvSpPr>
+          <p:cNvPr id="29" name="Desc 29"/>
+          <p:cNvSpPr txBox="1"/>
+          <p:nvPr/>
+        </p:nvSpPr>
+        <p:spPr>
+          <a:xfrm>
+            <a:off x="9240926" y="4206240"/>
+            <a:ext cx="2148840" cy="1783080"/>
+          </a:xfrm>
+          <a:prstGeom prst="rect">
+            <a:avLst/>
+          </a:prstGeom>
+          <a:noFill/>
+          <a:ln>
+            <a:noFill/>
+          </a:ln>
+        </p:spPr>
+        <p:txBody>
+          <a:bodyPr wrap="square" lIns="0" tIns="0" rIns="0" bIns="0" anchor="t">
+            <a:noAutofit/>
+          </a:bodyPr>
+          <a:lstStyle/>
+          <a:p>
+            <a:pPr algn="l">
+              <a:lnSpc>
+                <a:spcPct val="120000"/>
+              </a:lnSpc>
+              <a:spcAft>
+                <a:spcPts val="0"/>
+              </a:spcAft>
+            </a:pPr>
+            <a:r>
+              <a:rPr lang="en-US" sz="1400" b="0" i="0" u="none">
+                <a:solidFill>
+                  <a:srgbClr val="9CA3AF"/>
+                </a:solidFill>
+                <a:latin typeface="Outfit"/>
+              </a:rPr>
+              <a:t>Sentiment tracks the long triage queue and is below an acceptable level.</a:t>
+            </a:r>
+          </a:p>
+        </p:txBody>
+      </p:sp>
+    </p:spTree>
+  </p:cSld>
+  <p:clrMapOvr>
+    <a:masterClrMapping/>
+  </p:clrMapOvr>
+</p:sld>
+</file>
+
+<file path=ppt/slides/slide17.xml><?xml version="1.0" encoding="utf-8"?>
+<p:sld xmlns:a="http://schemas.openxmlformats.org/drawingml/2006/main" xmlns:r="http://schemas.openxmlformats.org/officeDocument/2006/relationships" xmlns:p="http://schemas.openxmlformats.org/presentationml/2006/main">
+  <p:cSld>
+    <p:spTree>
+      <p:nvGrpSpPr>
+        <p:cNvPr id="1" name=""/>
+        <p:cNvGrpSpPr/>
+        <p:nvPr/>
+      </p:nvGrpSpPr>
+      <p:grpSpPr>
+        <a:xfrm>
+          <a:off x="0" y="0"/>
+          <a:ext cx="0" cy="0"/>
+          <a:chOff x="0" y="0"/>
+          <a:chExt cx="0" cy="0"/>
+        </a:xfrm>
+      </p:grpSpPr>
+      <p:pic>
+        <p:nvPicPr>
+          <p:cNvPr id="2" name="Picture 1" descr="image.png"/>
+          <p:cNvPicPr>
+            <a:picLocks noChangeAspect="1"/>
+          </p:cNvPicPr>
+          <p:nvPr/>
+        </p:nvPicPr>
+        <p:blipFill>
+          <a:blip r:embed="rId2"/>
+          <a:stretch>
+            <a:fillRect/>
+          </a:stretch>
+        </p:blipFill>
+        <p:spPr>
+          <a:xfrm>
+            <a:off x="0" y="0"/>
+            <a:ext cx="12192000" cy="6858000"/>
+          </a:xfrm>
+          <a:prstGeom prst="rect">
+            <a:avLst/>
+          </a:prstGeom>
+        </p:spPr>
+      </p:pic>
+      <p:sp>
+        <p:nvSpPr>
+          <p:cNvPr id="11" name="Title 11"/>
+          <p:cNvSpPr txBox="1"/>
+          <p:nvPr/>
+        </p:nvSpPr>
+        <p:spPr>
+          <a:xfrm>
+            <a:off x="571500" y="493776"/>
+            <a:ext cx="10972800" cy="640080"/>
+          </a:xfrm>
+          <a:prstGeom prst="rect">
+            <a:avLst/>
+          </a:prstGeom>
+          <a:noFill/>
+          <a:ln>
+            <a:noFill/>
+          </a:ln>
+        </p:spPr>
+        <p:txBody>
+          <a:bodyPr wrap="square" lIns="0" tIns="0" rIns="0" bIns="0" anchor="t">
+            <a:noAutofit/>
+          </a:bodyPr>
+          <a:lstStyle/>
+          <a:p>
+            <a:pPr algn="l">
+              <a:spcAft>
+                <a:spcPts val="0"/>
+              </a:spcAft>
+            </a:pPr>
+            <a:r>
+              <a:rPr lang="en-US" sz="3450" b="1" i="0" u="none">
+                <a:solidFill>
+                  <a:srgbClr val="FFFFFF"/>
+                </a:solidFill>
+                <a:latin typeface="Space Grotesk"/>
+              </a:rPr>
+              <a:t>Problems &amp; </a:t>
+            </a:r>
+            <a:r>
+              <a:rPr lang="en-US" sz="3450" b="1" i="0" u="none">
+                <a:solidFill>
+                  <a:srgbClr val="38BDF8"/>
+                </a:solidFill>
+                <a:latin typeface="Space Grotesk"/>
+              </a:rPr>
+              <a:t>Proposed Solutions</a:t>
+            </a:r>
+          </a:p>
+        </p:txBody>
+      </p:sp>
+      <p:sp>
+        <p:nvSpPr>
+          <p:cNvPr id="12" name="Rule 12"/>
+          <p:cNvSpPr/>
+          <p:nvPr/>
+        </p:nvSpPr>
+        <p:spPr>
+          <a:xfrm>
+            <a:off x="571500" y="1185977"/>
+            <a:ext cx="11048695" cy="9510"/>
+          </a:xfrm>
+          <a:prstGeom prst="rect">
+            <a:avLst/>
+          </a:prstGeom>
+          <a:solidFill>
+            <a:srgbClr val="FFFFFF"/>
+          </a:solidFill>
+          <a:ln>
+            <a:noFill/>
+          </a:ln>
+        </p:spPr>
+        <p:txBody>
+          <a:bodyPr wrap="square" lIns="0" tIns="0" rIns="0" bIns="0" anchor="t">
+            <a:noAutofit/>
+          </a:bodyPr>
+          <a:lstStyle/>
+          <a:p>
+            <a:endParaRPr lang="en-US"/>
+          </a:p>
+        </p:txBody>
+      </p:sp>
+      <p:sp>
+        <p:nvSpPr>
+          <p:cNvPr id="13" name="Card 13"/>
+          <p:cNvSpPr/>
+          <p:nvPr/>
+        </p:nvSpPr>
+        <p:spPr>
+          <a:xfrm>
+            <a:off x="571500" y="1463040"/>
+            <a:ext cx="5029200" cy="1097280"/>
+          </a:xfrm>
+          <a:prstGeom prst="roundRect">
+            <a:avLst>
+              <a:gd name="adj" fmla="val 8000"/>
+            </a:avLst>
+          </a:prstGeom>
+          <a:solidFill>
+            <a:srgbClr val="111827"/>
+          </a:solidFill>
+          <a:ln w="9525">
+            <a:solidFill>
+              <a:srgbClr val="1F2937"/>
+            </a:solidFill>
+          </a:ln>
+        </p:spPr>
+        <p:txBody>
+          <a:bodyPr wrap="square" lIns="0" tIns="0" rIns="0" bIns="0" anchor="t">
+            <a:noAutofit/>
+          </a:bodyPr>
+          <a:lstStyle/>
+          <a:p>
+            <a:endParaRPr lang="en-US"/>
+          </a:p>
+        </p:txBody>
+      </p:sp>
+      <p:sp>
+        <p:nvSpPr>
+          <p:cNvPr id="14" name="Problem 14"/>
+          <p:cNvSpPr txBox="1"/>
+          <p:nvPr/>
+        </p:nvSpPr>
+        <p:spPr>
+          <a:xfrm>
+            <a:off x="777240" y="1600200"/>
+            <a:ext cx="4617720" cy="365760"/>
+          </a:xfrm>
+          <a:prstGeom prst="rect">
+            <a:avLst/>
+          </a:prstGeom>
+          <a:noFill/>
+          <a:ln>
+            <a:noFill/>
+          </a:ln>
+        </p:spPr>
+        <p:txBody>
+          <a:bodyPr wrap="square" lIns="0" tIns="0" rIns="0" bIns="0" anchor="t">
+            <a:noAutofit/>
+          </a:bodyPr>
+          <a:lstStyle/>
+          <a:p>
+            <a:pPr algn="l">
+              <a:spcAft>
+                <a:spcPts val="0"/>
+              </a:spcAft>
+            </a:pPr>
+            <a:r>
+              <a:rPr lang="en-US" sz="1700" b="1" i="0" u="none">
+                <a:solidFill>
+                  <a:srgbClr val="F59E0B"/>
+                </a:solidFill>
+                <a:latin typeface="Space Grotesk"/>
+              </a:rPr>
+              <a:t>Triage delays</a:t>
+            </a:r>
+          </a:p>
+        </p:txBody>
+      </p:sp>
+      <p:sp>
+        <p:nvSpPr>
+          <p:cNvPr id="15" name="ProblemDesc 15"/>
+          <p:cNvSpPr txBox="1"/>
+          <p:nvPr/>
+        </p:nvSpPr>
+        <p:spPr>
+          <a:xfrm>
+            <a:off x="777240" y="1993392"/>
+            <a:ext cx="4617720" cy="502920"/>
+          </a:xfrm>
+          <a:prstGeom prst="rect">
+            <a:avLst/>
+          </a:prstGeom>
+          <a:noFill/>
+          <a:ln>
+            <a:noFill/>
+          </a:ln>
+        </p:spPr>
+        <p:txBody>
+          <a:bodyPr wrap="square" lIns="0" tIns="0" rIns="0" bIns="0" anchor="t">
+            <a:noAutofit/>
+          </a:bodyPr>
+          <a:lstStyle/>
+          <a:p>
+            <a:pPr algn="l">
+              <a:spcAft>
+                <a:spcPts val="0"/>
+              </a:spcAft>
+            </a:pPr>
+            <a:r>
+              <a:rPr lang="en-US" sz="1400" b="0" i="0" u="none">
+                <a:solidFill>
+                  <a:srgbClr val="9CA3AF"/>
+                </a:solidFill>
+                <a:latin typeface="Outfit"/>
+              </a:rPr>
+              <a:t>57% of patients (273) miss the triage standard</a:t>
+            </a:r>
+          </a:p>
+        </p:txBody>
+      </p:sp>
+      <p:sp>
+        <p:nvSpPr>
+          <p:cNvPr id="16" name="Arrow 16"/>
+          <p:cNvSpPr txBox="1"/>
+          <p:nvPr/>
+        </p:nvSpPr>
+        <p:spPr>
+          <a:xfrm>
+            <a:off x="5760720" y="1783080"/>
+            <a:ext cx="667512" cy="457200"/>
+          </a:xfrm>
+          <a:prstGeom prst="rect">
+            <a:avLst/>
+          </a:prstGeom>
+          <a:noFill/>
+          <a:ln>
+            <a:noFill/>
+          </a:ln>
+        </p:spPr>
+        <p:txBody>
+          <a:bodyPr wrap="square" lIns="0" tIns="0" rIns="0" bIns="0" anchor="ctr">
+            <a:noAutofit/>
+          </a:bodyPr>
+          <a:lstStyle/>
+          <a:p>
+            <a:pPr algn="ctr">
+              <a:spcAft>
+                <a:spcPts val="0"/>
+              </a:spcAft>
+            </a:pPr>
+            <a:r>
+              <a:rPr lang="en-US" sz="3000" b="1" i="0" u="none">
+                <a:solidFill>
+                  <a:srgbClr val="38BDF8"/>
+                </a:solidFill>
+                <a:latin typeface="Outfit"/>
+              </a:rPr>
+              <a:t>→</a:t>
+            </a:r>
+          </a:p>
+        </p:txBody>
+      </p:sp>
+      <p:sp>
+        <p:nvSpPr>
+          <p:cNvPr id="17" name="Card 17"/>
+          <p:cNvSpPr/>
+          <p:nvPr/>
+        </p:nvSpPr>
+        <p:spPr>
+          <a:xfrm>
+            <a:off x="6583680" y="1463040"/>
+            <a:ext cx="5029200" cy="1097280"/>
+          </a:xfrm>
+          <a:prstGeom prst="roundRect">
+            <a:avLst>
+              <a:gd name="adj" fmla="val 8000"/>
+            </a:avLst>
+          </a:prstGeom>
+          <a:solidFill>
+            <a:srgbClr val="111827"/>
+          </a:solidFill>
+          <a:ln w="9525">
+            <a:solidFill>
+              <a:srgbClr val="1F2937"/>
+            </a:solidFill>
+          </a:ln>
+        </p:spPr>
+        <p:txBody>
+          <a:bodyPr wrap="square" lIns="0" tIns="0" rIns="0" bIns="0" anchor="t">
+            <a:noAutofit/>
+          </a:bodyPr>
+          <a:lstStyle/>
+          <a:p>
+            <a:endParaRPr lang="en-US"/>
+          </a:p>
+        </p:txBody>
+      </p:sp>
+      <p:sp>
+        <p:nvSpPr>
+          <p:cNvPr id="18" name="Solution 18"/>
+          <p:cNvSpPr txBox="1"/>
+          <p:nvPr/>
+        </p:nvSpPr>
+        <p:spPr>
+          <a:xfrm>
+            <a:off x="6812280" y="1600200"/>
+            <a:ext cx="4617720" cy="365760"/>
+          </a:xfrm>
+          <a:prstGeom prst="rect">
+            <a:avLst/>
+          </a:prstGeom>
+          <a:noFill/>
+          <a:ln>
+            <a:noFill/>
+          </a:ln>
+        </p:spPr>
+        <p:txBody>
+          <a:bodyPr wrap="square" lIns="0" tIns="0" rIns="0" bIns="0" anchor="t">
+            <a:noAutofit/>
+          </a:bodyPr>
+          <a:lstStyle/>
+          <a:p>
+            <a:pPr algn="l">
+              <a:spcAft>
+                <a:spcPts val="0"/>
+              </a:spcAft>
+            </a:pPr>
+            <a:r>
+              <a:rPr lang="en-US" sz="1700" b="1" i="0" u="none">
+                <a:solidFill>
+                  <a:srgbClr val="38BDF8"/>
+                </a:solidFill>
+                <a:latin typeface="Space Grotesk"/>
+              </a:rPr>
+              <a:t>Fast-track triage lane</a:t>
+            </a:r>
+          </a:p>
+        </p:txBody>
+      </p:sp>
+      <p:sp>
+        <p:nvSpPr>
+          <p:cNvPr id="19" name="SolutionDesc 19"/>
+          <p:cNvSpPr txBox="1"/>
+          <p:nvPr/>
+        </p:nvSpPr>
+        <p:spPr>
+          <a:xfrm>
+            <a:off x="6812280" y="1993392"/>
+            <a:ext cx="4617720" cy="502920"/>
+          </a:xfrm>
+          <a:prstGeom prst="rect">
+            <a:avLst/>
+          </a:prstGeom>
+          <a:noFill/>
+          <a:ln>
+            <a:noFill/>
+          </a:ln>
+        </p:spPr>
+        <p:txBody>
+          <a:bodyPr wrap="square" lIns="0" tIns="0" rIns="0" bIns="0" anchor="t">
+            <a:noAutofit/>
+          </a:bodyPr>
+          <a:lstStyle/>
+          <a:p>
+            <a:pPr algn="l">
+              <a:spcAft>
+                <a:spcPts val="0"/>
+              </a:spcAft>
+            </a:pPr>
+            <a:r>
+              <a:rPr lang="en-US" sz="1400" b="0" i="0" u="none">
+                <a:solidFill>
+                  <a:srgbClr val="9CA3AF"/>
+                </a:solidFill>
+                <a:latin typeface="Outfit"/>
+              </a:rPr>
+              <a:t>Nurse-led pre-triage at the door; split low-acuity from urgent cases</a:t>
+            </a:r>
+          </a:p>
+        </p:txBody>
+      </p:sp>
+      <p:sp>
+        <p:nvSpPr>
+          <p:cNvPr id="20" name="Card 20"/>
+          <p:cNvSpPr/>
+          <p:nvPr/>
+        </p:nvSpPr>
+        <p:spPr>
+          <a:xfrm>
+            <a:off x="571500" y="2697480"/>
+            <a:ext cx="5029200" cy="1097280"/>
+          </a:xfrm>
+          <a:prstGeom prst="roundRect">
+            <a:avLst>
+              <a:gd name="adj" fmla="val 8000"/>
+            </a:avLst>
+          </a:prstGeom>
+          <a:solidFill>
+            <a:srgbClr val="111827"/>
+          </a:solidFill>
+          <a:ln w="9525">
+            <a:solidFill>
+              <a:srgbClr val="1F2937"/>
+            </a:solidFill>
+          </a:ln>
+        </p:spPr>
+        <p:txBody>
+          <a:bodyPr wrap="square" lIns="0" tIns="0" rIns="0" bIns="0" anchor="t">
+            <a:noAutofit/>
+          </a:bodyPr>
+          <a:lstStyle/>
+          <a:p>
+            <a:endParaRPr lang="en-US"/>
+          </a:p>
+        </p:txBody>
+      </p:sp>
+      <p:sp>
+        <p:nvSpPr>
+          <p:cNvPr id="21" name="Problem 21"/>
+          <p:cNvSpPr txBox="1"/>
+          <p:nvPr/>
+        </p:nvSpPr>
+        <p:spPr>
+          <a:xfrm>
+            <a:off x="777240" y="2834640"/>
+            <a:ext cx="4617720" cy="365760"/>
+          </a:xfrm>
+          <a:prstGeom prst="rect">
+            <a:avLst/>
+          </a:prstGeom>
+          <a:noFill/>
+          <a:ln>
+            <a:noFill/>
+          </a:ln>
+        </p:spPr>
+        <p:txBody>
+          <a:bodyPr wrap="square" lIns="0" tIns="0" rIns="0" bIns="0" anchor="t">
+            <a:noAutofit/>
+          </a:bodyPr>
+          <a:lstStyle/>
+          <a:p>
+            <a:pPr algn="l">
+              <a:spcAft>
+                <a:spcPts val="0"/>
+              </a:spcAft>
+            </a:pPr>
+            <a:r>
+              <a:rPr lang="en-US" sz="1700" b="1" i="0" u="none">
+                <a:solidFill>
+                  <a:srgbClr val="F59E0B"/>
+                </a:solidFill>
+                <a:latin typeface="Space Grotesk"/>
+              </a:rPr>
+              <a:t>Walk-in burden</a:t>
+            </a:r>
+          </a:p>
+        </p:txBody>
+      </p:sp>
+      <p:sp>
+        <p:nvSpPr>
+          <p:cNvPr id="22" name="ProblemDesc 22"/>
+          <p:cNvSpPr txBox="1"/>
+          <p:nvPr/>
+        </p:nvSpPr>
+        <p:spPr>
+          <a:xfrm>
+            <a:off x="777240" y="3227832"/>
+            <a:ext cx="4617720" cy="502920"/>
+          </a:xfrm>
+          <a:prstGeom prst="rect">
+            <a:avLst/>
+          </a:prstGeom>
+          <a:noFill/>
+          <a:ln>
+            <a:noFill/>
+          </a:ln>
+        </p:spPr>
+        <p:txBody>
+          <a:bodyPr wrap="square" lIns="0" tIns="0" rIns="0" bIns="0" anchor="t">
+            <a:noAutofit/>
+          </a:bodyPr>
+          <a:lstStyle/>
+          <a:p>
+            <a:pPr algn="l">
+              <a:spcAft>
+                <a:spcPts val="0"/>
+              </a:spcAft>
+            </a:pPr>
+            <a:r>
+              <a:rPr lang="en-US" sz="1400" b="0" i="0" u="none">
+                <a:solidFill>
+                  <a:srgbClr val="9CA3AF"/>
+                </a:solidFill>
+                <a:latin typeface="Outfit"/>
+              </a:rPr>
+              <a:t>263 patients arrive with no referral</a:t>
+            </a:r>
+          </a:p>
+        </p:txBody>
+      </p:sp>
+      <p:sp>
+        <p:nvSpPr>
+          <p:cNvPr id="23" name="Arrow 23"/>
+          <p:cNvSpPr txBox="1"/>
+          <p:nvPr/>
+        </p:nvSpPr>
+        <p:spPr>
+          <a:xfrm>
+            <a:off x="5760720" y="3017520"/>
+            <a:ext cx="667512" cy="457200"/>
+          </a:xfrm>
+          <a:prstGeom prst="rect">
+            <a:avLst/>
+          </a:prstGeom>
+          <a:noFill/>
+          <a:ln>
+            <a:noFill/>
+          </a:ln>
+        </p:spPr>
+        <p:txBody>
+          <a:bodyPr wrap="square" lIns="0" tIns="0" rIns="0" bIns="0" anchor="ctr">
+            <a:noAutofit/>
+          </a:bodyPr>
+          <a:lstStyle/>
+          <a:p>
+            <a:pPr algn="ctr">
+              <a:spcAft>
+                <a:spcPts val="0"/>
+              </a:spcAft>
+            </a:pPr>
+            <a:r>
+              <a:rPr lang="en-US" sz="3000" b="1" i="0" u="none">
+                <a:solidFill>
+                  <a:srgbClr val="38BDF8"/>
+                </a:solidFill>
+                <a:latin typeface="Outfit"/>
+              </a:rPr>
+              <a:t>→</a:t>
+            </a:r>
+          </a:p>
+        </p:txBody>
+      </p:sp>
+      <p:sp>
+        <p:nvSpPr>
+          <p:cNvPr id="24" name="Card 24"/>
+          <p:cNvSpPr/>
+          <p:nvPr/>
+        </p:nvSpPr>
+        <p:spPr>
+          <a:xfrm>
+            <a:off x="6583680" y="2697480"/>
+            <a:ext cx="5029200" cy="1097280"/>
+          </a:xfrm>
+          <a:prstGeom prst="roundRect">
+            <a:avLst>
+              <a:gd name="adj" fmla="val 8000"/>
+            </a:avLst>
+          </a:prstGeom>
+          <a:solidFill>
+            <a:srgbClr val="111827"/>
+          </a:solidFill>
+          <a:ln w="9525">
+            <a:solidFill>
+              <a:srgbClr val="1F2937"/>
+            </a:solidFill>
+          </a:ln>
+        </p:spPr>
+        <p:txBody>
+          <a:bodyPr wrap="square" lIns="0" tIns="0" rIns="0" bIns="0" anchor="t">
+            <a:noAutofit/>
+          </a:bodyPr>
+          <a:lstStyle/>
+          <a:p>
+            <a:endParaRPr lang="en-US"/>
+          </a:p>
+        </p:txBody>
+      </p:sp>
+      <p:sp>
+        <p:nvSpPr>
+          <p:cNvPr id="25" name="Solution 25"/>
+          <p:cNvSpPr txBox="1"/>
+          <p:nvPr/>
+        </p:nvSpPr>
+        <p:spPr>
+          <a:xfrm>
+            <a:off x="6812280" y="2834640"/>
+            <a:ext cx="4617720" cy="365760"/>
+          </a:xfrm>
+          <a:prstGeom prst="rect">
+            <a:avLst/>
+          </a:prstGeom>
+          <a:noFill/>
+          <a:ln>
+            <a:noFill/>
+          </a:ln>
+        </p:spPr>
+        <p:txBody>
+          <a:bodyPr wrap="square" lIns="0" tIns="0" rIns="0" bIns="0" anchor="t">
+            <a:noAutofit/>
+          </a:bodyPr>
+          <a:lstStyle/>
+          <a:p>
+            <a:pPr algn="l">
+              <a:spcAft>
+                <a:spcPts val="0"/>
+              </a:spcAft>
+            </a:pPr>
+            <a:r>
+              <a:rPr lang="en-US" sz="1700" b="1" i="0" u="none">
+                <a:solidFill>
+                  <a:srgbClr val="38BDF8"/>
+                </a:solidFill>
+                <a:latin typeface="Space Grotesk"/>
+              </a:rPr>
+              <a:t>Walk-in intake desk</a:t>
+            </a:r>
+          </a:p>
+        </p:txBody>
+      </p:sp>
+      <p:sp>
+        <p:nvSpPr>
+          <p:cNvPr id="26" name="SolutionDesc 26"/>
+          <p:cNvSpPr txBox="1"/>
+          <p:nvPr/>
+        </p:nvSpPr>
+        <p:spPr>
+          <a:xfrm>
+            <a:off x="6812280" y="3227832"/>
+            <a:ext cx="4617720" cy="502920"/>
+          </a:xfrm>
+          <a:prstGeom prst="rect">
+            <a:avLst/>
+          </a:prstGeom>
+          <a:noFill/>
+          <a:ln>
+            <a:noFill/>
+          </a:ln>
+        </p:spPr>
+        <p:txBody>
+          <a:bodyPr wrap="square" lIns="0" tIns="0" rIns="0" bIns="0" anchor="t">
+            <a:noAutofit/>
+          </a:bodyPr>
+          <a:lstStyle/>
+          <a:p>
+            <a:pPr algn="l">
+              <a:spcAft>
+                <a:spcPts val="0"/>
+              </a:spcAft>
+            </a:pPr>
+            <a:r>
+              <a:rPr lang="en-US" sz="1400" b="0" i="0" u="none">
+                <a:solidFill>
+                  <a:srgbClr val="9CA3AF"/>
+                </a:solidFill>
+                <a:latin typeface="Outfit"/>
+              </a:rPr>
+              <a:t>Digital pre-registration and GP/urgent-care redirect for low-acuity cases</a:t>
+            </a:r>
+          </a:p>
+        </p:txBody>
+      </p:sp>
+      <p:sp>
+        <p:nvSpPr>
+          <p:cNvPr id="27" name="Card 27"/>
+          <p:cNvSpPr/>
+          <p:nvPr/>
+        </p:nvSpPr>
+        <p:spPr>
+          <a:xfrm>
+            <a:off x="571500" y="3931920"/>
+            <a:ext cx="5029200" cy="1097280"/>
+          </a:xfrm>
+          <a:prstGeom prst="roundRect">
+            <a:avLst>
+              <a:gd name="adj" fmla="val 8000"/>
+            </a:avLst>
+          </a:prstGeom>
+          <a:solidFill>
+            <a:srgbClr val="111827"/>
+          </a:solidFill>
+          <a:ln w="9525">
+            <a:solidFill>
+              <a:srgbClr val="1F2937"/>
+            </a:solidFill>
+          </a:ln>
+        </p:spPr>
+        <p:txBody>
+          <a:bodyPr wrap="square" lIns="0" tIns="0" rIns="0" bIns="0" anchor="t">
+            <a:noAutofit/>
+          </a:bodyPr>
+          <a:lstStyle/>
+          <a:p>
+            <a:endParaRPr lang="en-US"/>
+          </a:p>
+        </p:txBody>
+      </p:sp>
+      <p:sp>
+        <p:nvSpPr>
+          <p:cNvPr id="28" name="Problem 28"/>
+          <p:cNvSpPr txBox="1"/>
+          <p:nvPr/>
+        </p:nvSpPr>
+        <p:spPr>
+          <a:xfrm>
+            <a:off x="777240" y="4069080"/>
+            <a:ext cx="4617720" cy="365760"/>
+          </a:xfrm>
+          <a:prstGeom prst="rect">
+            <a:avLst/>
+          </a:prstGeom>
+          <a:noFill/>
+          <a:ln>
+            <a:noFill/>
+          </a:ln>
+        </p:spPr>
+        <p:txBody>
+          <a:bodyPr wrap="square" lIns="0" tIns="0" rIns="0" bIns="0" anchor="t">
+            <a:noAutofit/>
+          </a:bodyPr>
+          <a:lstStyle/>
+          <a:p>
+            <a:pPr algn="l">
+              <a:spcAft>
+                <a:spcPts val="0"/>
+              </a:spcAft>
+            </a:pPr>
+            <a:r>
+              <a:rPr lang="en-US" sz="1700" b="1" i="0" u="none">
+                <a:solidFill>
+                  <a:srgbClr val="F59E0B"/>
+                </a:solidFill>
+                <a:latin typeface="Space Grotesk"/>
+              </a:rPr>
+              <a:t>ER boarding</a:t>
+            </a:r>
+          </a:p>
+        </p:txBody>
+      </p:sp>
+      <p:sp>
+        <p:nvSpPr>
+          <p:cNvPr id="29" name="ProblemDesc 29"/>
+          <p:cNvSpPr txBox="1"/>
+          <p:nvPr/>
+        </p:nvSpPr>
+        <p:spPr>
+          <a:xfrm>
+            <a:off x="777240" y="4462272"/>
+            <a:ext cx="4617720" cy="502920"/>
+          </a:xfrm>
+          <a:prstGeom prst="rect">
+            <a:avLst/>
+          </a:prstGeom>
+          <a:noFill/>
+          <a:ln>
+            <a:noFill/>
+          </a:ln>
+        </p:spPr>
+        <p:txBody>
+          <a:bodyPr wrap="square" lIns="0" tIns="0" rIns="0" bIns="0" anchor="t">
+            <a:noAutofit/>
+          </a:bodyPr>
+          <a:lstStyle/>
+          <a:p>
+            <a:pPr algn="l">
+              <a:spcAft>
+                <a:spcPts val="0"/>
+              </a:spcAft>
+            </a:pPr>
+            <a:r>
+              <a:rPr lang="en-US" sz="1400" b="0" i="0" u="none">
+                <a:solidFill>
+                  <a:srgbClr val="9CA3AF"/>
+                </a:solidFill>
+                <a:latin typeface="Outfit"/>
+              </a:rPr>
+              <a:t>49% (237) admitted, waiting on inpatient beds</a:t>
+            </a:r>
+          </a:p>
+        </p:txBody>
+      </p:sp>
+      <p:sp>
+        <p:nvSpPr>
+          <p:cNvPr id="30" name="Arrow 30"/>
+          <p:cNvSpPr txBox="1"/>
+          <p:nvPr/>
+        </p:nvSpPr>
+        <p:spPr>
+          <a:xfrm>
+            <a:off x="5760720" y="4251960"/>
+            <a:ext cx="667512" cy="457200"/>
+          </a:xfrm>
+          <a:prstGeom prst="rect">
+            <a:avLst/>
+          </a:prstGeom>
+          <a:noFill/>
+          <a:ln>
+            <a:noFill/>
+          </a:ln>
+        </p:spPr>
+        <p:txBody>
+          <a:bodyPr wrap="square" lIns="0" tIns="0" rIns="0" bIns="0" anchor="ctr">
+            <a:noAutofit/>
+          </a:bodyPr>
+          <a:lstStyle/>
+          <a:p>
+            <a:pPr algn="ctr">
+              <a:spcAft>
+                <a:spcPts val="0"/>
+              </a:spcAft>
+            </a:pPr>
+            <a:r>
+              <a:rPr lang="en-US" sz="3000" b="1" i="0" u="none">
+                <a:solidFill>
+                  <a:srgbClr val="38BDF8"/>
+                </a:solidFill>
+                <a:latin typeface="Outfit"/>
+              </a:rPr>
+              <a:t>→</a:t>
+            </a:r>
+          </a:p>
+        </p:txBody>
+      </p:sp>
+      <p:sp>
+        <p:nvSpPr>
+          <p:cNvPr id="31" name="Card 31"/>
+          <p:cNvSpPr/>
+          <p:nvPr/>
+        </p:nvSpPr>
+        <p:spPr>
+          <a:xfrm>
+            <a:off x="6583680" y="3931920"/>
+            <a:ext cx="5029200" cy="1097280"/>
+          </a:xfrm>
+          <a:prstGeom prst="roundRect">
+            <a:avLst>
+              <a:gd name="adj" fmla="val 8000"/>
+            </a:avLst>
+          </a:prstGeom>
+          <a:solidFill>
+            <a:srgbClr val="111827"/>
+          </a:solidFill>
+          <a:ln w="9525">
+            <a:solidFill>
+              <a:srgbClr val="1F2937"/>
+            </a:solidFill>
+          </a:ln>
+        </p:spPr>
+        <p:txBody>
+          <a:bodyPr wrap="square" lIns="0" tIns="0" rIns="0" bIns="0" anchor="t">
+            <a:noAutofit/>
+          </a:bodyPr>
+          <a:lstStyle/>
+          <a:p>
+            <a:endParaRPr lang="en-US"/>
+          </a:p>
+        </p:txBody>
+      </p:sp>
+      <p:sp>
+        <p:nvSpPr>
+          <p:cNvPr id="32" name="Solution 32"/>
+          <p:cNvSpPr txBox="1"/>
+          <p:nvPr/>
+        </p:nvSpPr>
+        <p:spPr>
+          <a:xfrm>
+            <a:off x="6812280" y="4069080"/>
+            <a:ext cx="4617720" cy="365760"/>
+          </a:xfrm>
+          <a:prstGeom prst="rect">
+            <a:avLst/>
+          </a:prstGeom>
+          <a:noFill/>
+          <a:ln>
+            <a:noFill/>
+          </a:ln>
+        </p:spPr>
+        <p:txBody>
+          <a:bodyPr wrap="square" lIns="0" tIns="0" rIns="0" bIns="0" anchor="t">
+            <a:noAutofit/>
+          </a:bodyPr>
+          <a:lstStyle/>
+          <a:p>
+            <a:pPr algn="l">
+              <a:spcAft>
+                <a:spcPts val="0"/>
+              </a:spcAft>
+            </a:pPr>
+            <a:r>
+              <a:rPr lang="en-US" sz="1700" b="1" i="0" u="none">
+                <a:solidFill>
+                  <a:srgbClr val="38BDF8"/>
+                </a:solidFill>
+                <a:latin typeface="Space Grotesk"/>
+              </a:rPr>
+              <a:t>Bed-flow management</a:t>
+            </a:r>
+          </a:p>
+        </p:txBody>
+      </p:sp>
+      <p:sp>
+        <p:nvSpPr>
+          <p:cNvPr id="33" name="SolutionDesc 33"/>
+          <p:cNvSpPr txBox="1"/>
+          <p:nvPr/>
+        </p:nvSpPr>
+        <p:spPr>
+          <a:xfrm>
+            <a:off x="6812280" y="4462272"/>
+            <a:ext cx="4617720" cy="502920"/>
+          </a:xfrm>
+          <a:prstGeom prst="rect">
+            <a:avLst/>
+          </a:prstGeom>
+          <a:noFill/>
+          <a:ln>
+            <a:noFill/>
+          </a:ln>
+        </p:spPr>
+        <p:txBody>
+          <a:bodyPr wrap="square" lIns="0" tIns="0" rIns="0" bIns="0" anchor="t">
+            <a:noAutofit/>
+          </a:bodyPr>
+          <a:lstStyle/>
+          <a:p>
+            <a:pPr algn="l">
+              <a:spcAft>
+                <a:spcPts val="0"/>
+              </a:spcAft>
+            </a:pPr>
+            <a:r>
+              <a:rPr lang="en-US" sz="1400" b="0" i="0" u="none">
+                <a:solidFill>
+                  <a:srgbClr val="9CA3AF"/>
+                </a:solidFill>
+                <a:latin typeface="Outfit"/>
+              </a:rPr>
+              <a:t>Daily bed huddles, earlier discharges, a dedicated admission-holding area</a:t>
+            </a:r>
+          </a:p>
+        </p:txBody>
+      </p:sp>
+      <p:sp>
+        <p:nvSpPr>
+          <p:cNvPr id="34" name="Card 34"/>
+          <p:cNvSpPr/>
+          <p:nvPr/>
+        </p:nvSpPr>
+        <p:spPr>
+          <a:xfrm>
+            <a:off x="571500" y="5166360"/>
+            <a:ext cx="5029200" cy="1097280"/>
+          </a:xfrm>
+          <a:prstGeom prst="roundRect">
+            <a:avLst>
+              <a:gd name="adj" fmla="val 8000"/>
+            </a:avLst>
+          </a:prstGeom>
+          <a:solidFill>
+            <a:srgbClr val="111827"/>
+          </a:solidFill>
+          <a:ln w="9525">
+            <a:solidFill>
+              <a:srgbClr val="1F2937"/>
+            </a:solidFill>
+          </a:ln>
+        </p:spPr>
+        <p:txBody>
+          <a:bodyPr wrap="square" lIns="0" tIns="0" rIns="0" bIns="0" anchor="t">
+            <a:noAutofit/>
+          </a:bodyPr>
+          <a:lstStyle/>
+          <a:p>
+            <a:endParaRPr lang="en-US"/>
+          </a:p>
+        </p:txBody>
+      </p:sp>
+      <p:sp>
+        <p:nvSpPr>
+          <p:cNvPr id="35" name="Problem 35"/>
+          <p:cNvSpPr txBox="1"/>
+          <p:nvPr/>
+        </p:nvSpPr>
+        <p:spPr>
+          <a:xfrm>
+            <a:off x="777240" y="5303520"/>
+            <a:ext cx="4617720" cy="365760"/>
+          </a:xfrm>
+          <a:prstGeom prst="rect">
+            <a:avLst/>
+          </a:prstGeom>
+          <a:noFill/>
+          <a:ln>
+            <a:noFill/>
+          </a:ln>
+        </p:spPr>
+        <p:txBody>
+          <a:bodyPr wrap="square" lIns="0" tIns="0" rIns="0" bIns="0" anchor="t">
+            <a:noAutofit/>
+          </a:bodyPr>
+          <a:lstStyle/>
+          <a:p>
+            <a:pPr algn="l">
+              <a:spcAft>
+                <a:spcPts val="0"/>
+              </a:spcAft>
+            </a:pPr>
+            <a:r>
+              <a:rPr lang="en-US" sz="1700" b="1" i="0" u="none">
+                <a:solidFill>
+                  <a:srgbClr val="F59E0B"/>
+                </a:solidFill>
+                <a:latin typeface="Space Grotesk"/>
+              </a:rPr>
+              <a:t>Demand peaks</a:t>
+            </a:r>
+          </a:p>
+        </p:txBody>
+      </p:sp>
+      <p:sp>
+        <p:nvSpPr>
+          <p:cNvPr id="36" name="ProblemDesc 36"/>
+          <p:cNvSpPr txBox="1"/>
+          <p:nvPr/>
+        </p:nvSpPr>
+        <p:spPr>
+          <a:xfrm>
+            <a:off x="777240" y="5696712"/>
+            <a:ext cx="4617720" cy="502920"/>
+          </a:xfrm>
+          <a:prstGeom prst="rect">
+            <a:avLst/>
+          </a:prstGeom>
+          <a:noFill/>
+          <a:ln>
+            <a:noFill/>
+          </a:ln>
+        </p:spPr>
+        <p:txBody>
+          <a:bodyPr wrap="square" lIns="0" tIns="0" rIns="0" bIns="0" anchor="t">
+            <a:noAutofit/>
+          </a:bodyPr>
+          <a:lstStyle/>
+          <a:p>
+            <a:pPr algn="l">
+              <a:spcAft>
+                <a:spcPts val="0"/>
+              </a:spcAft>
+            </a:pPr>
+            <a:r>
+              <a:rPr lang="en-US" sz="1400" b="0" i="0" u="none">
+                <a:solidFill>
+                  <a:srgbClr val="9CA3AF"/>
+                </a:solidFill>
+                <a:latin typeface="Outfit"/>
+              </a:rPr>
+              <a:t>Volume peaks at ages 0-9 (70) and 60-69 (71)</a:t>
+            </a:r>
+          </a:p>
+        </p:txBody>
+      </p:sp>
+      <p:sp>
+        <p:nvSpPr>
+          <p:cNvPr id="37" name="Arrow 37"/>
+          <p:cNvSpPr txBox="1"/>
+          <p:nvPr/>
+        </p:nvSpPr>
+        <p:spPr>
+          <a:xfrm>
+            <a:off x="5760720" y="5486400"/>
+            <a:ext cx="667512" cy="457200"/>
+          </a:xfrm>
+          <a:prstGeom prst="rect">
+            <a:avLst/>
+          </a:prstGeom>
+          <a:noFill/>
+          <a:ln>
+            <a:noFill/>
+          </a:ln>
+        </p:spPr>
+        <p:txBody>
+          <a:bodyPr wrap="square" lIns="0" tIns="0" rIns="0" bIns="0" anchor="ctr">
+            <a:noAutofit/>
+          </a:bodyPr>
+          <a:lstStyle/>
+          <a:p>
+            <a:pPr algn="ctr">
+              <a:spcAft>
+                <a:spcPts val="0"/>
+              </a:spcAft>
+            </a:pPr>
+            <a:r>
+              <a:rPr lang="en-US" sz="3000" b="1" i="0" u="none">
+                <a:solidFill>
+                  <a:srgbClr val="38BDF8"/>
+                </a:solidFill>
+                <a:latin typeface="Outfit"/>
+              </a:rPr>
+              <a:t>→</a:t>
+            </a:r>
+          </a:p>
+        </p:txBody>
+      </p:sp>
+      <p:sp>
+        <p:nvSpPr>
+          <p:cNvPr id="38" name="Card 38"/>
+          <p:cNvSpPr/>
+          <p:nvPr/>
+        </p:nvSpPr>
+        <p:spPr>
+          <a:xfrm>
+            <a:off x="6583680" y="5166360"/>
+            <a:ext cx="5029200" cy="1097280"/>
+          </a:xfrm>
+          <a:prstGeom prst="roundRect">
+            <a:avLst>
+              <a:gd name="adj" fmla="val 8000"/>
+            </a:avLst>
+          </a:prstGeom>
+          <a:solidFill>
+            <a:srgbClr val="111827"/>
+          </a:solidFill>
+          <a:ln w="9525">
+            <a:solidFill>
+              <a:srgbClr val="1F2937"/>
+            </a:solidFill>
+          </a:ln>
+        </p:spPr>
+        <p:txBody>
+          <a:bodyPr wrap="square" lIns="0" tIns="0" rIns="0" bIns="0" anchor="t">
+            <a:noAutofit/>
+          </a:bodyPr>
+          <a:lstStyle/>
+          <a:p>
+            <a:endParaRPr lang="en-US"/>
+          </a:p>
+        </p:txBody>
+      </p:sp>
+      <p:sp>
+        <p:nvSpPr>
+          <p:cNvPr id="39" name="Solution 39"/>
+          <p:cNvSpPr txBox="1"/>
+          <p:nvPr/>
+        </p:nvSpPr>
+        <p:spPr>
+          <a:xfrm>
+            <a:off x="6812280" y="5303520"/>
+            <a:ext cx="4617720" cy="365760"/>
+          </a:xfrm>
+          <a:prstGeom prst="rect">
+            <a:avLst/>
+          </a:prstGeom>
+          <a:noFill/>
+          <a:ln>
+            <a:noFill/>
+          </a:ln>
+        </p:spPr>
+        <p:txBody>
+          <a:bodyPr wrap="square" lIns="0" tIns="0" rIns="0" bIns="0" anchor="t">
+            <a:noAutofit/>
+          </a:bodyPr>
+          <a:lstStyle/>
+          <a:p>
+            <a:pPr algn="l">
+              <a:spcAft>
+                <a:spcPts val="0"/>
+              </a:spcAft>
+            </a:pPr>
+            <a:r>
+              <a:rPr lang="en-US" sz="1700" b="1" i="0" u="none">
+                <a:solidFill>
+                  <a:srgbClr val="38BDF8"/>
+                </a:solidFill>
+                <a:latin typeface="Space Grotesk"/>
+              </a:rPr>
+              <a:t>Specialist staffing</a:t>
+            </a:r>
+          </a:p>
+        </p:txBody>
+      </p:sp>
+      <p:sp>
+        <p:nvSpPr>
+          <p:cNvPr id="40" name="SolutionDesc 40"/>
+          <p:cNvSpPr txBox="1"/>
+          <p:nvPr/>
+        </p:nvSpPr>
+        <p:spPr>
+          <a:xfrm>
+            <a:off x="6812280" y="5696712"/>
+            <a:ext cx="4617720" cy="502920"/>
+          </a:xfrm>
+          <a:prstGeom prst="rect">
+            <a:avLst/>
+          </a:prstGeom>
+          <a:noFill/>
+          <a:ln>
+            <a:noFill/>
+          </a:ln>
+        </p:spPr>
+        <p:txBody>
+          <a:bodyPr wrap="square" lIns="0" tIns="0" rIns="0" bIns="0" anchor="t">
+            <a:noAutofit/>
+          </a:bodyPr>
+          <a:lstStyle/>
+          <a:p>
+            <a:pPr algn="l">
+              <a:spcAft>
+                <a:spcPts val="0"/>
+              </a:spcAft>
+            </a:pPr>
+            <a:r>
+              <a:rPr lang="en-US" sz="1400" b="0" i="0" u="none">
+                <a:solidFill>
+                  <a:srgbClr val="9CA3AF"/>
+                </a:solidFill>
+                <a:latin typeface="Outfit"/>
+              </a:rPr>
+              <a:t>Roster pediatric and geriatric nurses to match peak demand</a:t>
+            </a:r>
+          </a:p>
+        </p:txBody>
+      </p:sp>
+    </p:spTree>
+  </p:cSld>
+  <p:clrMapOvr>
+    <a:masterClrMapping/>
+  </p:clrMapOvr>
+</p:sld>
+</file>
+
+<file path=ppt/slides/slide18.xml><?xml version="1.0" encoding="utf-8"?>
+<p:sld xmlns:a="http://schemas.openxmlformats.org/drawingml/2006/main" xmlns:r="http://schemas.openxmlformats.org/officeDocument/2006/relationships" xmlns:p="http://schemas.openxmlformats.org/presentationml/2006/main">
+  <p:cSld>
+    <p:spTree>
+      <p:nvGrpSpPr>
+        <p:cNvPr id="1" name=""/>
+        <p:cNvGrpSpPr/>
+        <p:nvPr/>
+      </p:nvGrpSpPr>
+      <p:grpSpPr>
+        <a:xfrm>
+          <a:off x="0" y="0"/>
+          <a:ext cx="0" cy="0"/>
+          <a:chOff x="0" y="0"/>
+          <a:chExt cx="0" cy="0"/>
+        </a:xfrm>
+      </p:grpSpPr>
+      <p:pic>
+        <p:nvPicPr>
+          <p:cNvPr id="2" name="Picture 1" descr="image.png"/>
+          <p:cNvPicPr>
+            <a:picLocks noChangeAspect="1"/>
+          </p:cNvPicPr>
+          <p:nvPr/>
+        </p:nvPicPr>
+        <p:blipFill>
+          <a:blip r:embed="rId2"/>
+          <a:stretch>
+            <a:fillRect/>
+          </a:stretch>
+        </p:blipFill>
+        <p:spPr>
+          <a:xfrm>
+            <a:off x="0" y="0"/>
+            <a:ext cx="12192000" cy="6858000"/>
+          </a:xfrm>
+          <a:prstGeom prst="rect">
+            <a:avLst/>
+          </a:prstGeom>
+        </p:spPr>
+      </p:pic>
+      <p:sp>
+        <p:nvSpPr>
+          <p:cNvPr id="11" name="Title 11"/>
+          <p:cNvSpPr txBox="1"/>
+          <p:nvPr/>
+        </p:nvSpPr>
+        <p:spPr>
+          <a:xfrm>
+            <a:off x="571500" y="493776"/>
+            <a:ext cx="10972800" cy="640080"/>
+          </a:xfrm>
+          <a:prstGeom prst="rect">
+            <a:avLst/>
+          </a:prstGeom>
+          <a:noFill/>
+          <a:ln>
+            <a:noFill/>
+          </a:ln>
+        </p:spPr>
+        <p:txBody>
+          <a:bodyPr wrap="square" lIns="0" tIns="0" rIns="0" bIns="0" anchor="t">
+            <a:noAutofit/>
+          </a:bodyPr>
+          <a:lstStyle/>
+          <a:p>
+            <a:pPr algn="l">
+              <a:spcAft>
+                <a:spcPts val="0"/>
+              </a:spcAft>
+            </a:pPr>
+            <a:r>
+              <a:rPr lang="en-US" sz="3450" b="1" i="0" u="none">
+                <a:solidFill>
+                  <a:srgbClr val="FFFFFF"/>
+                </a:solidFill>
+                <a:latin typeface="Space Grotesk"/>
+              </a:rPr>
+              <a:t>Expected </a:t>
+            </a:r>
+            <a:r>
+              <a:rPr lang="en-US" sz="3450" b="1" i="0" u="none">
+                <a:solidFill>
+                  <a:srgbClr val="38BDF8"/>
+                </a:solidFill>
+                <a:latin typeface="Space Grotesk"/>
+              </a:rPr>
+              <a:t>Impact &amp; Next Steps</a:t>
+            </a:r>
+          </a:p>
+        </p:txBody>
+      </p:sp>
+      <p:sp>
+        <p:nvSpPr>
+          <p:cNvPr id="12" name="Rule 12"/>
+          <p:cNvSpPr/>
+          <p:nvPr/>
+        </p:nvSpPr>
+        <p:spPr>
+          <a:xfrm>
+            <a:off x="571500" y="1185977"/>
+            <a:ext cx="11048695" cy="9510"/>
+          </a:xfrm>
+          <a:prstGeom prst="rect">
+            <a:avLst/>
+          </a:prstGeom>
+          <a:solidFill>
+            <a:srgbClr val="FFFFFF"/>
+          </a:solidFill>
+          <a:ln>
+            <a:noFill/>
+          </a:ln>
+        </p:spPr>
+        <p:txBody>
+          <a:bodyPr wrap="square" lIns="0" tIns="0" rIns="0" bIns="0" anchor="t">
+            <a:noAutofit/>
+          </a:bodyPr>
+          <a:lstStyle/>
+          <a:p>
+            <a:endParaRPr lang="en-US"/>
+          </a:p>
+        </p:txBody>
+      </p:sp>
+      <p:sp>
+        <p:nvSpPr>
+          <p:cNvPr id="13" name="Card 13"/>
+          <p:cNvSpPr/>
+          <p:nvPr/>
+        </p:nvSpPr>
+        <p:spPr>
+          <a:xfrm>
+            <a:off x="571500" y="1463040"/>
+            <a:ext cx="3520440" cy="2103120"/>
+          </a:xfrm>
+          <a:prstGeom prst="roundRect">
+            <a:avLst>
+              <a:gd name="adj" fmla="val 8000"/>
+            </a:avLst>
+          </a:prstGeom>
+          <a:solidFill>
+            <a:srgbClr val="111827"/>
+          </a:solidFill>
+          <a:ln w="9525">
+            <a:solidFill>
+              <a:srgbClr val="1F2937"/>
+            </a:solidFill>
+          </a:ln>
+        </p:spPr>
+        <p:txBody>
+          <a:bodyPr wrap="square" lIns="0" tIns="0" rIns="0" bIns="0" anchor="t">
+            <a:noAutofit/>
+          </a:bodyPr>
+          <a:lstStyle/>
+          <a:p>
+            <a:endParaRPr lang="en-US"/>
+          </a:p>
+        </p:txBody>
+      </p:sp>
+      <p:sp>
+        <p:nvSpPr>
+          <p:cNvPr id="14" name="Label 14"/>
+          <p:cNvSpPr txBox="1"/>
+          <p:nvPr/>
+        </p:nvSpPr>
+        <p:spPr>
+          <a:xfrm>
+            <a:off x="800100" y="1600200"/>
+            <a:ext cx="3063240" cy="365760"/>
+          </a:xfrm>
+          <a:prstGeom prst="rect">
+            <a:avLst/>
+          </a:prstGeom>
+          <a:noFill/>
+          <a:ln>
+            <a:noFill/>
+          </a:ln>
+        </p:spPr>
+        <p:txBody>
+          <a:bodyPr wrap="square" lIns="0" tIns="0" rIns="0" bIns="0" anchor="t">
+            <a:noAutofit/>
+          </a:bodyPr>
+          <a:lstStyle/>
+          <a:p>
+            <a:pPr algn="l">
+              <a:spcAft>
+                <a:spcPts val="0"/>
+              </a:spcAft>
+            </a:pPr>
+            <a:r>
+              <a:rPr lang="en-US" sz="1200" b="1" i="0" u="none">
+                <a:solidFill>
+                  <a:srgbClr val="E5E7EB"/>
+                </a:solidFill>
+                <a:latin typeface="Outfit"/>
+              </a:rPr>
+              <a:t>PATIENTS DELAYED</a:t>
+            </a:r>
+          </a:p>
+        </p:txBody>
+      </p:sp>
+      <p:sp>
+        <p:nvSpPr>
+          <p:cNvPr id="15" name="Stat 15"/>
+          <p:cNvSpPr txBox="1"/>
+          <p:nvPr/>
+        </p:nvSpPr>
+        <p:spPr>
+          <a:xfrm>
+            <a:off x="800100" y="2103120"/>
+            <a:ext cx="3063240" cy="640080"/>
+          </a:xfrm>
+          <a:prstGeom prst="rect">
+            <a:avLst/>
+          </a:prstGeom>
+          <a:noFill/>
+          <a:ln>
+            <a:noFill/>
+          </a:ln>
+        </p:spPr>
+        <p:txBody>
+          <a:bodyPr wrap="square" lIns="0" tIns="0" rIns="0" bIns="0" anchor="t">
+            <a:noAutofit/>
+          </a:bodyPr>
+          <a:lstStyle/>
+          <a:p>
+            <a:pPr algn="l">
+              <a:spcAft>
+                <a:spcPts val="0"/>
+              </a:spcAft>
+            </a:pPr>
+            <a:r>
+              <a:rPr lang="en-US" sz="2600" b="1" i="0" u="none">
+                <a:solidFill>
+                  <a:srgbClr val="9CA3AF"/>
+                </a:solidFill>
+                <a:latin typeface="Space Grotesk"/>
+              </a:rPr>
+              <a:t>57%</a:t>
+            </a:r>
+            <a:r>
+              <a:rPr lang="en-US" sz="2000" b="1" i="0" u="none">
+                <a:solidFill>
+                  <a:srgbClr val="38BDF8"/>
+                </a:solidFill>
+                <a:latin typeface="Outfit"/>
+              </a:rPr>
+              <a:t>  →  </a:t>
+            </a:r>
+            <a:r>
+              <a:rPr lang="en-US" sz="2600" b="1" i="0" u="none">
+                <a:solidFill>
+                  <a:srgbClr val="38BDF8"/>
+                </a:solidFill>
+                <a:latin typeface="Space Grotesk"/>
+              </a:rPr>
+              <a:t>&lt; 30%</a:t>
+            </a:r>
+          </a:p>
+        </p:txBody>
+      </p:sp>
+      <p:sp>
+        <p:nvSpPr>
+          <p:cNvPr id="16" name="Cap 16"/>
+          <p:cNvSpPr txBox="1"/>
+          <p:nvPr/>
+        </p:nvSpPr>
+        <p:spPr>
+          <a:xfrm>
+            <a:off x="800100" y="2880360"/>
+            <a:ext cx="3063240" cy="548640"/>
+          </a:xfrm>
+          <a:prstGeom prst="rect">
+            <a:avLst/>
+          </a:prstGeom>
+          <a:noFill/>
+          <a:ln>
+            <a:noFill/>
+          </a:ln>
+        </p:spPr>
+        <p:txBody>
+          <a:bodyPr wrap="square" lIns="0" tIns="0" rIns="0" bIns="0" anchor="t">
+            <a:noAutofit/>
+          </a:bodyPr>
+          <a:lstStyle/>
+          <a:p>
+            <a:pPr algn="l">
+              <a:spcAft>
+                <a:spcPts val="0"/>
+              </a:spcAft>
+            </a:pPr>
+            <a:r>
+              <a:rPr lang="en-US" sz="1300" b="0" i="0" u="none">
+                <a:solidFill>
+                  <a:srgbClr val="9CA3AF"/>
+                </a:solidFill>
+                <a:latin typeface="Outfit"/>
+              </a:rPr>
+              <a:t>Current → proposed target</a:t>
+            </a:r>
+          </a:p>
+        </p:txBody>
+      </p:sp>
+      <p:sp>
+        <p:nvSpPr>
+          <p:cNvPr id="17" name="Card 17"/>
+          <p:cNvSpPr/>
+          <p:nvPr/>
+        </p:nvSpPr>
+        <p:spPr>
+          <a:xfrm>
+            <a:off x="4334256" y="1463040"/>
+            <a:ext cx="3520440" cy="2103120"/>
+          </a:xfrm>
+          <a:prstGeom prst="roundRect">
+            <a:avLst>
+              <a:gd name="adj" fmla="val 8000"/>
+            </a:avLst>
+          </a:prstGeom>
+          <a:solidFill>
+            <a:srgbClr val="111827"/>
+          </a:solidFill>
+          <a:ln w="9525">
+            <a:solidFill>
+              <a:srgbClr val="1F2937"/>
+            </a:solidFill>
+          </a:ln>
+        </p:spPr>
+        <p:txBody>
+          <a:bodyPr wrap="square" lIns="0" tIns="0" rIns="0" bIns="0" anchor="t">
+            <a:noAutofit/>
+          </a:bodyPr>
+          <a:lstStyle/>
+          <a:p>
+            <a:endParaRPr lang="en-US"/>
+          </a:p>
+        </p:txBody>
+      </p:sp>
+      <p:sp>
+        <p:nvSpPr>
+          <p:cNvPr id="18" name="Label 18"/>
+          <p:cNvSpPr txBox="1"/>
+          <p:nvPr/>
+        </p:nvSpPr>
+        <p:spPr>
+          <a:xfrm>
+            <a:off x="4562856" y="1600200"/>
+            <a:ext cx="3063240" cy="365760"/>
+          </a:xfrm>
+          <a:prstGeom prst="rect">
+            <a:avLst/>
+          </a:prstGeom>
+          <a:noFill/>
+          <a:ln>
+            <a:noFill/>
+          </a:ln>
+        </p:spPr>
+        <p:txBody>
+          <a:bodyPr wrap="square" lIns="0" tIns="0" rIns="0" bIns="0" anchor="t">
+            <a:noAutofit/>
+          </a:bodyPr>
+          <a:lstStyle/>
+          <a:p>
+            <a:pPr algn="l">
+              <a:spcAft>
+                <a:spcPts val="0"/>
+              </a:spcAft>
+            </a:pPr>
+            <a:r>
+              <a:rPr lang="en-US" sz="1200" b="1" i="0" u="none">
+                <a:solidFill>
+                  <a:srgbClr val="E5E7EB"/>
+                </a:solidFill>
+                <a:latin typeface="Outfit"/>
+              </a:rPr>
+              <a:t>AVG. WAIT TIME (MIN)</a:t>
+            </a:r>
+          </a:p>
+        </p:txBody>
+      </p:sp>
+      <p:sp>
+        <p:nvSpPr>
+          <p:cNvPr id="19" name="Stat 19"/>
+          <p:cNvSpPr txBox="1"/>
+          <p:nvPr/>
+        </p:nvSpPr>
+        <p:spPr>
+          <a:xfrm>
+            <a:off x="4562856" y="2103120"/>
+            <a:ext cx="3063240" cy="640080"/>
+          </a:xfrm>
+          <a:prstGeom prst="rect">
+            <a:avLst/>
+          </a:prstGeom>
+          <a:noFill/>
+          <a:ln>
+            <a:noFill/>
+          </a:ln>
+        </p:spPr>
+        <p:txBody>
+          <a:bodyPr wrap="square" lIns="0" tIns="0" rIns="0" bIns="0" anchor="t">
+            <a:noAutofit/>
+          </a:bodyPr>
+          <a:lstStyle/>
+          <a:p>
+            <a:pPr algn="l">
+              <a:spcAft>
+                <a:spcPts val="0"/>
+              </a:spcAft>
+            </a:pPr>
+            <a:r>
+              <a:rPr lang="en-US" sz="2600" b="1" i="0" u="none">
+                <a:solidFill>
+                  <a:srgbClr val="9CA3AF"/>
+                </a:solidFill>
+                <a:latin typeface="Space Grotesk"/>
+              </a:rPr>
+              <a:t>34.9</a:t>
+            </a:r>
+            <a:r>
+              <a:rPr lang="en-US" sz="2000" b="1" i="0" u="none">
+                <a:solidFill>
+                  <a:srgbClr val="38BDF8"/>
+                </a:solidFill>
+                <a:latin typeface="Outfit"/>
+              </a:rPr>
+              <a:t>  →  </a:t>
+            </a:r>
+            <a:r>
+              <a:rPr lang="en-US" sz="2600" b="1" i="0" u="none">
+                <a:solidFill>
+                  <a:srgbClr val="38BDF8"/>
+                </a:solidFill>
+                <a:latin typeface="Space Grotesk"/>
+              </a:rPr>
+              <a:t>≤ 25</a:t>
+            </a:r>
+          </a:p>
+        </p:txBody>
+      </p:sp>
+      <p:sp>
+        <p:nvSpPr>
+          <p:cNvPr id="20" name="Cap 20"/>
+          <p:cNvSpPr txBox="1"/>
+          <p:nvPr/>
+        </p:nvSpPr>
+        <p:spPr>
+          <a:xfrm>
+            <a:off x="4562856" y="2880360"/>
+            <a:ext cx="3063240" cy="548640"/>
+          </a:xfrm>
+          <a:prstGeom prst="rect">
+            <a:avLst/>
+          </a:prstGeom>
+          <a:noFill/>
+          <a:ln>
+            <a:noFill/>
+          </a:ln>
+        </p:spPr>
+        <p:txBody>
+          <a:bodyPr wrap="square" lIns="0" tIns="0" rIns="0" bIns="0" anchor="t">
+            <a:noAutofit/>
+          </a:bodyPr>
+          <a:lstStyle/>
+          <a:p>
+            <a:pPr algn="l">
+              <a:spcAft>
+                <a:spcPts val="0"/>
+              </a:spcAft>
+            </a:pPr>
+            <a:r>
+              <a:rPr lang="en-US" sz="1300" b="0" i="0" u="none">
+                <a:solidFill>
+                  <a:srgbClr val="9CA3AF"/>
+                </a:solidFill>
+                <a:latin typeface="Outfit"/>
+              </a:rPr>
+              <a:t>Current → proposed target</a:t>
+            </a:r>
+          </a:p>
+        </p:txBody>
+      </p:sp>
+      <p:sp>
+        <p:nvSpPr>
+          <p:cNvPr id="21" name="Card 21"/>
+          <p:cNvSpPr/>
+          <p:nvPr/>
+        </p:nvSpPr>
+        <p:spPr>
+          <a:xfrm>
+            <a:off x="8097012" y="1463040"/>
+            <a:ext cx="3520440" cy="2103120"/>
+          </a:xfrm>
+          <a:prstGeom prst="roundRect">
+            <a:avLst>
+              <a:gd name="adj" fmla="val 8000"/>
+            </a:avLst>
+          </a:prstGeom>
+          <a:solidFill>
+            <a:srgbClr val="111827"/>
+          </a:solidFill>
+          <a:ln w="9525">
+            <a:solidFill>
+              <a:srgbClr val="1F2937"/>
+            </a:solidFill>
+          </a:ln>
+        </p:spPr>
+        <p:txBody>
+          <a:bodyPr wrap="square" lIns="0" tIns="0" rIns="0" bIns="0" anchor="t">
+            <a:noAutofit/>
+          </a:bodyPr>
+          <a:lstStyle/>
+          <a:p>
+            <a:endParaRPr lang="en-US"/>
+          </a:p>
+        </p:txBody>
+      </p:sp>
+      <p:sp>
+        <p:nvSpPr>
+          <p:cNvPr id="22" name="Label 22"/>
+          <p:cNvSpPr txBox="1"/>
+          <p:nvPr/>
+        </p:nvSpPr>
+        <p:spPr>
+          <a:xfrm>
+            <a:off x="8325612" y="1600200"/>
+            <a:ext cx="3063240" cy="365760"/>
+          </a:xfrm>
+          <a:prstGeom prst="rect">
+            <a:avLst/>
+          </a:prstGeom>
+          <a:noFill/>
+          <a:ln>
+            <a:noFill/>
+          </a:ln>
+        </p:spPr>
+        <p:txBody>
+          <a:bodyPr wrap="square" lIns="0" tIns="0" rIns="0" bIns="0" anchor="t">
+            <a:noAutofit/>
+          </a:bodyPr>
+          <a:lstStyle/>
+          <a:p>
+            <a:pPr algn="l">
+              <a:spcAft>
+                <a:spcPts val="0"/>
+              </a:spcAft>
+            </a:pPr>
+            <a:r>
+              <a:rPr lang="en-US" sz="1200" b="1" i="0" u="none">
+                <a:solidFill>
+                  <a:srgbClr val="E5E7EB"/>
+                </a:solidFill>
+                <a:latin typeface="Outfit"/>
+              </a:rPr>
+              <a:t>SATISFACTION SCORE</a:t>
+            </a:r>
+          </a:p>
+        </p:txBody>
+      </p:sp>
+      <p:sp>
+        <p:nvSpPr>
+          <p:cNvPr id="23" name="Stat 23"/>
+          <p:cNvSpPr txBox="1"/>
+          <p:nvPr/>
+        </p:nvSpPr>
+        <p:spPr>
+          <a:xfrm>
+            <a:off x="8325612" y="2103120"/>
+            <a:ext cx="3063240" cy="640080"/>
+          </a:xfrm>
+          <a:prstGeom prst="rect">
+            <a:avLst/>
+          </a:prstGeom>
+          <a:noFill/>
+          <a:ln>
+            <a:noFill/>
+          </a:ln>
+        </p:spPr>
+        <p:txBody>
+          <a:bodyPr wrap="square" lIns="0" tIns="0" rIns="0" bIns="0" anchor="t">
+            <a:noAutofit/>
+          </a:bodyPr>
+          <a:lstStyle/>
+          <a:p>
+            <a:pPr algn="l">
+              <a:spcAft>
+                <a:spcPts val="0"/>
+              </a:spcAft>
+            </a:pPr>
+            <a:r>
+              <a:rPr lang="en-US" sz="2600" b="1" i="0" u="none">
+                <a:solidFill>
+                  <a:srgbClr val="9CA3AF"/>
+                </a:solidFill>
+                <a:latin typeface="Space Grotesk"/>
+              </a:rPr>
+              <a:t>5.30</a:t>
+            </a:r>
+            <a:r>
+              <a:rPr lang="en-US" sz="2000" b="1" i="0" u="none">
+                <a:solidFill>
+                  <a:srgbClr val="38BDF8"/>
+                </a:solidFill>
+                <a:latin typeface="Outfit"/>
+              </a:rPr>
+              <a:t>  →  </a:t>
+            </a:r>
+            <a:r>
+              <a:rPr lang="en-US" sz="2600" b="1" i="0" u="none">
+                <a:solidFill>
+                  <a:srgbClr val="38BDF8"/>
+                </a:solidFill>
+                <a:latin typeface="Space Grotesk"/>
+              </a:rPr>
+              <a:t>≥ 7.0</a:t>
+            </a:r>
+          </a:p>
+        </p:txBody>
+      </p:sp>
+      <p:sp>
+        <p:nvSpPr>
+          <p:cNvPr id="24" name="Cap 24"/>
+          <p:cNvSpPr txBox="1"/>
+          <p:nvPr/>
+        </p:nvSpPr>
+        <p:spPr>
+          <a:xfrm>
+            <a:off x="8325612" y="2880360"/>
+            <a:ext cx="3063240" cy="548640"/>
+          </a:xfrm>
+          <a:prstGeom prst="rect">
+            <a:avLst/>
+          </a:prstGeom>
+          <a:noFill/>
+          <a:ln>
+            <a:noFill/>
+          </a:ln>
+        </p:spPr>
+        <p:txBody>
+          <a:bodyPr wrap="square" lIns="0" tIns="0" rIns="0" bIns="0" anchor="t">
+            <a:noAutofit/>
+          </a:bodyPr>
+          <a:lstStyle/>
+          <a:p>
+            <a:pPr algn="l">
+              <a:spcAft>
+                <a:spcPts val="0"/>
+              </a:spcAft>
+            </a:pPr>
+            <a:r>
+              <a:rPr lang="en-US" sz="1300" b="0" i="0" u="none">
+                <a:solidFill>
+                  <a:srgbClr val="9CA3AF"/>
+                </a:solidFill>
+                <a:latin typeface="Outfit"/>
+              </a:rPr>
+              <a:t>Current → proposed target</a:t>
+            </a:r>
+          </a:p>
+        </p:txBody>
+      </p:sp>
+      <p:sp>
+        <p:nvSpPr>
+          <p:cNvPr id="25" name="Card 25"/>
+          <p:cNvSpPr/>
+          <p:nvPr/>
+        </p:nvSpPr>
+        <p:spPr>
+          <a:xfrm>
+            <a:off x="571500" y="3840480"/>
+            <a:ext cx="3520440" cy="2286000"/>
+          </a:xfrm>
+          <a:prstGeom prst="roundRect">
+            <a:avLst>
+              <a:gd name="adj" fmla="val 8000"/>
+            </a:avLst>
+          </a:prstGeom>
+          <a:solidFill>
+            <a:srgbClr val="111827"/>
+          </a:solidFill>
+          <a:ln w="9525">
+            <a:solidFill>
+              <a:srgbClr val="1F2937"/>
+            </a:solidFill>
+          </a:ln>
+        </p:spPr>
+        <p:txBody>
+          <a:bodyPr wrap="square" lIns="0" tIns="0" rIns="0" bIns="0" anchor="t">
+            <a:noAutofit/>
+          </a:bodyPr>
+          <a:lstStyle/>
+          <a:p>
+            <a:endParaRPr lang="en-US"/>
+          </a:p>
+        </p:txBody>
+      </p:sp>
+      <p:sp>
+        <p:nvSpPr>
+          <p:cNvPr id="26" name="Phase 26"/>
+          <p:cNvSpPr txBox="1"/>
+          <p:nvPr/>
+        </p:nvSpPr>
+        <p:spPr>
+          <a:xfrm>
+            <a:off x="800100" y="3977640"/>
+            <a:ext cx="3063240" cy="320040"/>
+          </a:xfrm>
+          <a:prstGeom prst="rect">
+            <a:avLst/>
+          </a:prstGeom>
+          <a:noFill/>
+          <a:ln>
+            <a:noFill/>
+          </a:ln>
+        </p:spPr>
+        <p:txBody>
+          <a:bodyPr wrap="square" lIns="0" tIns="0" rIns="0" bIns="0" anchor="t">
+            <a:noAutofit/>
+          </a:bodyPr>
+          <a:lstStyle/>
+          <a:p>
+            <a:pPr algn="l">
+              <a:spcAft>
+                <a:spcPts val="0"/>
+              </a:spcAft>
+            </a:pPr>
+            <a:r>
+              <a:rPr lang="en-US" sz="1200" b="1" i="0" u="none">
+                <a:solidFill>
+                  <a:srgbClr val="38BDF8"/>
+                </a:solidFill>
+                <a:latin typeface="Outfit"/>
+              </a:rPr>
+              <a:t>WEEKS 1-4</a:t>
+            </a:r>
+          </a:p>
+        </p:txBody>
+      </p:sp>
+      <p:sp>
+        <p:nvSpPr>
+          <p:cNvPr id="27" name="PhaseTitle 27"/>
+          <p:cNvSpPr txBox="1"/>
+          <p:nvPr/>
+        </p:nvSpPr>
+        <p:spPr>
+          <a:xfrm>
+            <a:off x="800100" y="4343400"/>
+            <a:ext cx="3063240" cy="411480"/>
+          </a:xfrm>
+          <a:prstGeom prst="rect">
+            <a:avLst/>
+          </a:prstGeom>
+          <a:noFill/>
+          <a:ln>
+            <a:noFill/>
+          </a:ln>
+        </p:spPr>
+        <p:txBody>
+          <a:bodyPr wrap="square" lIns="0" tIns="0" rIns="0" bIns="0" anchor="t">
+            <a:noAutofit/>
+          </a:bodyPr>
+          <a:lstStyle/>
+          <a:p>
+            <a:pPr algn="l">
+              <a:spcAft>
+                <a:spcPts val="0"/>
+              </a:spcAft>
+            </a:pPr>
+            <a:r>
+              <a:rPr lang="en-US" sz="1800" b="1" i="0" u="none">
+                <a:solidFill>
+                  <a:srgbClr val="FFFFFF"/>
+                </a:solidFill>
+                <a:latin typeface="Space Grotesk"/>
+              </a:rPr>
+              <a:t>Launch quick wins</a:t>
+            </a:r>
+          </a:p>
+        </p:txBody>
+      </p:sp>
+      <p:sp>
+        <p:nvSpPr>
+          <p:cNvPr id="28" name="PhaseDesc 28"/>
+          <p:cNvSpPr txBox="1"/>
+          <p:nvPr/>
+        </p:nvSpPr>
+        <p:spPr>
+          <a:xfrm>
+            <a:off x="800100" y="4846320"/>
+            <a:ext cx="3063240" cy="1188720"/>
+          </a:xfrm>
+          <a:prstGeom prst="rect">
+            <a:avLst/>
+          </a:prstGeom>
+          <a:noFill/>
+          <a:ln>
+            <a:noFill/>
+          </a:ln>
+        </p:spPr>
+        <p:txBody>
+          <a:bodyPr wrap="square" lIns="0" tIns="0" rIns="0" bIns="0" anchor="t">
+            <a:noAutofit/>
+          </a:bodyPr>
+          <a:lstStyle/>
+          <a:p>
+            <a:pPr algn="l">
+              <a:lnSpc>
+                <a:spcPct val="120000"/>
+              </a:lnSpc>
+              <a:spcAft>
+                <a:spcPts val="0"/>
+              </a:spcAft>
+            </a:pPr>
+            <a:r>
+              <a:rPr lang="en-US" sz="1400" b="0" i="0" u="none">
+                <a:solidFill>
+                  <a:srgbClr val="9CA3AF"/>
+                </a:solidFill>
+                <a:latin typeface="Outfit"/>
+              </a:rPr>
+              <a:t>Open the fast-track lane and walk-in desk; start daily bed huddles.</a:t>
+            </a:r>
+          </a:p>
+        </p:txBody>
+      </p:sp>
+      <p:sp>
+        <p:nvSpPr>
+          <p:cNvPr id="29" name="Card 29"/>
+          <p:cNvSpPr/>
+          <p:nvPr/>
+        </p:nvSpPr>
+        <p:spPr>
+          <a:xfrm>
+            <a:off x="4334256" y="3840480"/>
+            <a:ext cx="3520440" cy="2286000"/>
+          </a:xfrm>
+          <a:prstGeom prst="roundRect">
+            <a:avLst>
+              <a:gd name="adj" fmla="val 8000"/>
+            </a:avLst>
+          </a:prstGeom>
+          <a:solidFill>
+            <a:srgbClr val="111827"/>
+          </a:solidFill>
+          <a:ln w="9525">
+            <a:solidFill>
+              <a:srgbClr val="1F2937"/>
+            </a:solidFill>
+          </a:ln>
+        </p:spPr>
+        <p:txBody>
+          <a:bodyPr wrap="square" lIns="0" tIns="0" rIns="0" bIns="0" anchor="t">
+            <a:noAutofit/>
+          </a:bodyPr>
+          <a:lstStyle/>
+          <a:p>
+            <a:endParaRPr lang="en-US"/>
+          </a:p>
+        </p:txBody>
+      </p:sp>
+      <p:sp>
+        <p:nvSpPr>
+          <p:cNvPr id="30" name="Phase 30"/>
+          <p:cNvSpPr txBox="1"/>
+          <p:nvPr/>
+        </p:nvSpPr>
+        <p:spPr>
+          <a:xfrm>
+            <a:off x="4562856" y="3977640"/>
+            <a:ext cx="3063240" cy="320040"/>
+          </a:xfrm>
+          <a:prstGeom prst="rect">
+            <a:avLst/>
+          </a:prstGeom>
+          <a:noFill/>
+          <a:ln>
+            <a:noFill/>
+          </a:ln>
+        </p:spPr>
+        <p:txBody>
+          <a:bodyPr wrap="square" lIns="0" tIns="0" rIns="0" bIns="0" anchor="t">
+            <a:noAutofit/>
+          </a:bodyPr>
+          <a:lstStyle/>
+          <a:p>
+            <a:pPr algn="l">
+              <a:spcAft>
+                <a:spcPts val="0"/>
+              </a:spcAft>
+            </a:pPr>
+            <a:r>
+              <a:rPr lang="en-US" sz="1200" b="1" i="0" u="none">
+                <a:solidFill>
+                  <a:srgbClr val="38BDF8"/>
+                </a:solidFill>
+                <a:latin typeface="Outfit"/>
+              </a:rPr>
+              <a:t>MONTHS 2-3</a:t>
+            </a:r>
+          </a:p>
+        </p:txBody>
+      </p:sp>
+      <p:sp>
+        <p:nvSpPr>
+          <p:cNvPr id="31" name="PhaseTitle 31"/>
+          <p:cNvSpPr txBox="1"/>
+          <p:nvPr/>
+        </p:nvSpPr>
+        <p:spPr>
+          <a:xfrm>
+            <a:off x="4562856" y="4343400"/>
+            <a:ext cx="3063240" cy="411480"/>
+          </a:xfrm>
+          <a:prstGeom prst="rect">
+            <a:avLst/>
+          </a:prstGeom>
+          <a:noFill/>
+          <a:ln>
+            <a:noFill/>
+          </a:ln>
+        </p:spPr>
+        <p:txBody>
+          <a:bodyPr wrap="square" lIns="0" tIns="0" rIns="0" bIns="0" anchor="t">
+            <a:noAutofit/>
+          </a:bodyPr>
+          <a:lstStyle/>
+          <a:p>
+            <a:pPr algn="l">
+              <a:spcAft>
+                <a:spcPts val="0"/>
+              </a:spcAft>
+            </a:pPr>
+            <a:r>
+              <a:rPr lang="en-US" sz="1800" b="1" i="0" u="none">
+                <a:solidFill>
+                  <a:srgbClr val="FFFFFF"/>
+                </a:solidFill>
+                <a:latin typeface="Space Grotesk"/>
+              </a:rPr>
+              <a:t>Align capacity</a:t>
+            </a:r>
+          </a:p>
+        </p:txBody>
+      </p:sp>
+      <p:sp>
+        <p:nvSpPr>
+          <p:cNvPr id="32" name="PhaseDesc 32"/>
+          <p:cNvSpPr txBox="1"/>
+          <p:nvPr/>
+        </p:nvSpPr>
+        <p:spPr>
+          <a:xfrm>
+            <a:off x="4562856" y="4846320"/>
+            <a:ext cx="3063240" cy="1188720"/>
+          </a:xfrm>
+          <a:prstGeom prst="rect">
+            <a:avLst/>
+          </a:prstGeom>
+          <a:noFill/>
+          <a:ln>
+            <a:noFill/>
+          </a:ln>
+        </p:spPr>
+        <p:txBody>
+          <a:bodyPr wrap="square" lIns="0" tIns="0" rIns="0" bIns="0" anchor="t">
+            <a:noAutofit/>
+          </a:bodyPr>
+          <a:lstStyle/>
+          <a:p>
+            <a:pPr algn="l">
+              <a:lnSpc>
+                <a:spcPct val="120000"/>
+              </a:lnSpc>
+              <a:spcAft>
+                <a:spcPts val="0"/>
+              </a:spcAft>
+            </a:pPr>
+            <a:r>
+              <a:rPr lang="en-US" sz="1400" b="0" i="0" u="none">
+                <a:solidFill>
+                  <a:srgbClr val="9CA3AF"/>
+                </a:solidFill>
+                <a:latin typeface="Outfit"/>
+              </a:rPr>
+              <a:t>Adjust pediatric and geriatric rosters; add digital pre-registration.</a:t>
+            </a:r>
+          </a:p>
+        </p:txBody>
+      </p:sp>
+      <p:sp>
+        <p:nvSpPr>
+          <p:cNvPr id="33" name="Card 33"/>
+          <p:cNvSpPr/>
+          <p:nvPr/>
+        </p:nvSpPr>
+        <p:spPr>
+          <a:xfrm>
+            <a:off x="8097012" y="3840480"/>
+            <a:ext cx="3520440" cy="2286000"/>
+          </a:xfrm>
+          <a:prstGeom prst="roundRect">
+            <a:avLst>
+              <a:gd name="adj" fmla="val 8000"/>
+            </a:avLst>
+          </a:prstGeom>
+          <a:solidFill>
+            <a:srgbClr val="111827"/>
+          </a:solidFill>
+          <a:ln w="9525">
+            <a:solidFill>
+              <a:srgbClr val="1F2937"/>
+            </a:solidFill>
+          </a:ln>
+        </p:spPr>
+        <p:txBody>
+          <a:bodyPr wrap="square" lIns="0" tIns="0" rIns="0" bIns="0" anchor="t">
+            <a:noAutofit/>
+          </a:bodyPr>
+          <a:lstStyle/>
+          <a:p>
+            <a:endParaRPr lang="en-US"/>
+          </a:p>
+        </p:txBody>
+      </p:sp>
+      <p:sp>
+        <p:nvSpPr>
+          <p:cNvPr id="34" name="Phase 34"/>
+          <p:cNvSpPr txBox="1"/>
+          <p:nvPr/>
+        </p:nvSpPr>
+        <p:spPr>
+          <a:xfrm>
+            <a:off x="8325612" y="3977640"/>
+            <a:ext cx="3063240" cy="320040"/>
+          </a:xfrm>
+          <a:prstGeom prst="rect">
+            <a:avLst/>
+          </a:prstGeom>
+          <a:noFill/>
+          <a:ln>
+            <a:noFill/>
+          </a:ln>
+        </p:spPr>
+        <p:txBody>
+          <a:bodyPr wrap="square" lIns="0" tIns="0" rIns="0" bIns="0" anchor="t">
+            <a:noAutofit/>
+          </a:bodyPr>
+          <a:lstStyle/>
+          <a:p>
+            <a:pPr algn="l">
+              <a:spcAft>
+                <a:spcPts val="0"/>
+              </a:spcAft>
+            </a:pPr>
+            <a:r>
+              <a:rPr lang="en-US" sz="1200" b="1" i="0" u="none">
+                <a:solidFill>
+                  <a:srgbClr val="38BDF8"/>
+                </a:solidFill>
+                <a:latin typeface="Outfit"/>
+              </a:rPr>
+              <a:t>MONTH 4+</a:t>
+            </a:r>
+          </a:p>
+        </p:txBody>
+      </p:sp>
+      <p:sp>
+        <p:nvSpPr>
+          <p:cNvPr id="35" name="PhaseTitle 35"/>
+          <p:cNvSpPr txBox="1"/>
+          <p:nvPr/>
+        </p:nvSpPr>
+        <p:spPr>
+          <a:xfrm>
+            <a:off x="8325612" y="4343400"/>
+            <a:ext cx="3063240" cy="411480"/>
+          </a:xfrm>
+          <a:prstGeom prst="rect">
+            <a:avLst/>
+          </a:prstGeom>
+          <a:noFill/>
+          <a:ln>
+            <a:noFill/>
+          </a:ln>
+        </p:spPr>
+        <p:txBody>
+          <a:bodyPr wrap="square" lIns="0" tIns="0" rIns="0" bIns="0" anchor="t">
+            <a:noAutofit/>
+          </a:bodyPr>
+          <a:lstStyle/>
+          <a:p>
+            <a:pPr algn="l">
+              <a:spcAft>
+                <a:spcPts val="0"/>
+              </a:spcAft>
+            </a:pPr>
+            <a:r>
+              <a:rPr lang="en-US" sz="1800" b="1" i="0" u="none">
+                <a:solidFill>
+                  <a:srgbClr val="FFFFFF"/>
+                </a:solidFill>
+                <a:latin typeface="Space Grotesk"/>
+              </a:rPr>
+              <a:t>Measure and refine</a:t>
+            </a:r>
+          </a:p>
+        </p:txBody>
+      </p:sp>
+      <p:sp>
+        <p:nvSpPr>
+          <p:cNvPr id="36" name="PhaseDesc 36"/>
+          <p:cNvSpPr txBox="1"/>
+          <p:nvPr/>
+        </p:nvSpPr>
+        <p:spPr>
+          <a:xfrm>
+            <a:off x="8325612" y="4846320"/>
+            <a:ext cx="3063240" cy="1188720"/>
+          </a:xfrm>
+          <a:prstGeom prst="rect">
+            <a:avLst/>
+          </a:prstGeom>
+          <a:noFill/>
+          <a:ln>
+            <a:noFill/>
+          </a:ln>
+        </p:spPr>
+        <p:txBody>
+          <a:bodyPr wrap="square" lIns="0" tIns="0" rIns="0" bIns="0" anchor="t">
+            <a:noAutofit/>
+          </a:bodyPr>
+          <a:lstStyle/>
+          <a:p>
+            <a:pPr algn="l">
+              <a:lnSpc>
+                <a:spcPct val="120000"/>
+              </a:lnSpc>
+              <a:spcAft>
+                <a:spcPts val="0"/>
+              </a:spcAft>
+            </a:pPr>
+            <a:r>
+              <a:rPr lang="en-US" sz="1400" b="0" i="0" u="none">
+                <a:solidFill>
+                  <a:srgbClr val="9CA3AF"/>
+                </a:solidFill>
+                <a:latin typeface="Outfit"/>
+              </a:rPr>
+              <a:t>Track delay %, wait time and satisfaction on the dashboard monthly.</a:t>
+            </a:r>
+          </a:p>
+        </p:txBody>
+      </p:sp>
+      <p:sp>
+        <p:nvSpPr>
+          <p:cNvPr id="37" name="Note 37"/>
+          <p:cNvSpPr txBox="1"/>
+          <p:nvPr/>
+        </p:nvSpPr>
+        <p:spPr>
+          <a:xfrm>
+            <a:off x="571500" y="6217920"/>
+            <a:ext cx="10972800" cy="274320"/>
+          </a:xfrm>
+          <a:prstGeom prst="rect">
+            <a:avLst/>
+          </a:prstGeom>
+          <a:noFill/>
+          <a:ln>
+            <a:noFill/>
+          </a:ln>
+        </p:spPr>
+        <p:txBody>
+          <a:bodyPr wrap="square" lIns="0" tIns="0" rIns="0" bIns="0" anchor="t">
+            <a:noAutofit/>
+          </a:bodyPr>
+          <a:lstStyle/>
+          <a:p>
+            <a:pPr algn="l">
+              <a:spcAft>
+                <a:spcPts val="0"/>
+              </a:spcAft>
+            </a:pPr>
+            <a:r>
+              <a:rPr lang="en-US" sz="1100" b="0" i="1" u="none">
+                <a:solidFill>
+                  <a:srgbClr val="9CA3AF"/>
+                </a:solidFill>
+                <a:latin typeface="Outfit"/>
+              </a:rPr>
+              <a:t>Targets are proposed goals for discussion with ER leadership, not forecasts.</a:t>
             </a:r>
           </a:p>
         </p:txBody>
